--- a/deliverable_models/答辩PPT.pptx
+++ b/deliverable_models/答辩PPT.pptx
@@ -5011,7 +5011,7 @@
               </a:defRPr>
             </a:pPr>
             <a:r>
-              <a:t>  - PPO强化学习实现毫秒级动态决策，+88.3% vs FCFS（p=1.032e-42）</a:t>
+              <a:t>  - PPO强化学习实现毫秒级动态决策，+123.4% vs FCFS（p=1.449e-66）</a:t>
             </a:r>
           </a:p>
           <a:p>
@@ -6129,7 +6129,7 @@
               </a:defRPr>
             </a:pPr>
             <a:r>
-              <a:t>  - Q: 利用率为什么比FCFS低？ A: 帕累托最优权衡（牺牲1.2%利用率换88.3%奖励提升）</a:t>
+              <a:t>  - Q: 利用率为什么比FCFS低？ A: 帕累托最优权衡（牺牲1.2%利用率换123.4%奖励提升）</a:t>
             </a:r>
           </a:p>
           <a:p>
@@ -6547,7 +6547,7 @@
               </a:defRPr>
             </a:pPr>
             <a:r>
-              <a:t>第一层：调度层 — PPO智能调度实时最优分流，+88.3% vs FCFS（N=250, p=1.032e-42）</a:t>
+              <a:t>第一层：调度层 — PPO智能调度实时最优分流，+123.4% vs FCFS（N=250, p=1.449e-66）</a:t>
             </a:r>
           </a:p>
           <a:p>
@@ -6607,7 +6607,7 @@
               </a:defRPr>
             </a:pPr>
             <a:r>
-              <a:t>关键数字：PPO +88.3%、防饥饿0.60 vs 22.00、推理延迟~1ms、315次真机调用100%成功</a:t>
+              <a:t>关键数字：PPO +123.4%、防饥饿0.60 vs 22.00、推理延迟~1ms、315次真机调用100%成功</a:t>
             </a:r>
           </a:p>
         </p:txBody>
@@ -6942,7 +6942,7 @@
               </a:defRPr>
             </a:pPr>
             <a:r>
-              <a:t>PPO策略综合奖励领先：比FCFS提升88.3%</a:t>
+              <a:t>PPO策略综合奖励领先：比FCFS提升123.4%</a:t>
             </a:r>
           </a:p>
         </p:txBody>
@@ -7650,7 +7650,7 @@
               </a:defRPr>
             </a:pPr>
             <a:r>
-              <a:t>帕累托最优权衡：PPO牺牲1.2%利用率换取88.3%总奖励提升（多目标优化合理取舍）</a:t>
+              <a:t>帕累托最优权衡：PPO牺牲1.2%利用率换取123.4%总奖励提升（多目标优化合理取舍）</a:t>
             </a:r>
           </a:p>
         </p:txBody>
@@ -8682,7 +8682,7 @@
               </a:defRPr>
             </a:pPr>
             <a:r>
-              <a:t>  - 等待时间：+6.1%（10seeds，探索性，Issue #532）</a:t>
+              <a:t>  - N=25 配对检验：奖励下降12.43%（Wilcoxon p=2.98e-08, 事后功效1.0）</a:t>
             </a:r>
           </a:p>
           <a:p>
@@ -8697,7 +8697,7 @@
               </a:defRPr>
             </a:pPr>
             <a:r>
-              <a:t>  - 单seed -5.7% 方向相反，待更多数据验证</a:t>
+              <a:t>  - N=25 配对检验：噪声致奖励下降12.43%（Wilcoxon p=2.98e-08, Cohen's d_z=7.71）</a:t>
             </a:r>
           </a:p>
           <a:p>

--- a/deliverable_models/答辩PPT.pptx
+++ b/deliverable_models/答辩PPT.pptx
@@ -23,6 +23,7 @@
     <p:sldId id="271" r:id="rId22"/>
     <p:sldId id="272" r:id="rId23"/>
     <p:sldId id="273" r:id="rId24"/>
+    <p:sldId id="274" r:id="rId25"/>
   </p:sldIdLst>
   <p:sldSz cx="9144000" cy="6858000" type="screen4x3"/>
   <p:notesSz cx="6858000" cy="9144000"/>
@@ -6175,6 +6176,138 @@
             </a:pPr>
             <a:r>
               <a:t>  - Q: PPO不是在所有场景都最优？ A: PPO核心价值是跨场景适应性（平均排名1.8）</a:t>
+            </a:r>
+          </a:p>
+        </p:txBody>
+      </p:sp>
+    </p:spTree>
+  </p:cSld>
+  <p:clrMapOvr>
+    <a:masterClrMapping/>
+  </p:clrMapOvr>
+</p:sld>
+</file>
+
+<file path=ppt/slides/slide19.xml><?xml version="1.0" encoding="utf-8"?>
+<p:sld xmlns:a="http://schemas.openxmlformats.org/drawingml/2006/main" xmlns:p="http://schemas.openxmlformats.org/presentationml/2006/main" xmlns:r="http://schemas.openxmlformats.org/officeDocument/2006/relationships">
+  <p:cSld>
+    <p:spTree>
+      <p:nvGrpSpPr>
+        <p:cNvPr id="1" name=""/>
+        <p:cNvGrpSpPr/>
+        <p:nvPr/>
+      </p:nvGrpSpPr>
+      <p:grpSpPr/>
+      <p:sp>
+        <p:nvSpPr>
+          <p:cNvPr id="2" name="Title 1"/>
+          <p:cNvSpPr>
+            <a:spLocks noGrp="1"/>
+          </p:cNvSpPr>
+          <p:nvPr>
+            <p:ph type="title"/>
+          </p:nvPr>
+        </p:nvSpPr>
+        <p:spPr/>
+        <p:txBody>
+          <a:bodyPr/>
+          <a:lstStyle/>
+          <a:p>
+            <a:r>
+              <a:t>公平性感知调度：多租户公平性度量与监控</a:t>
+            </a:r>
+          </a:p>
+        </p:txBody>
+      </p:sp>
+      <p:sp>
+        <p:nvSpPr>
+          <p:cNvPr id="3" name="Content Placeholder 2"/>
+          <p:cNvSpPr>
+            <a:spLocks noGrp="1"/>
+          </p:cNvSpPr>
+          <p:nvPr>
+            <p:ph idx="1"/>
+          </p:nvPr>
+        </p:nvSpPr>
+        <p:spPr/>
+        <p:txBody>
+          <a:bodyPr/>
+          <a:lstStyle/>
+          <a:p>
+            <a:pPr>
+              <a:defRPr sz="1400"/>
+            </a:pPr>
+            <a:r>
+              <a:t>场景：租户不平衡负载（tenant_A 80% / B 10% / C 10%）</a:t>
+            </a:r>
+          </a:p>
+          <a:p>
+            <a:pPr>
+              <a:defRPr sz="1400"/>
+            </a:pPr>
+            <a:r>
+              <a:t>公平性度量（MultiTenantFairnessTracker）:</a:t>
+            </a:r>
+          </a:p>
+          <a:p>
+            <a:pPr>
+              <a:defRPr sz="1400"/>
+            </a:pPr>
+            <a:r>
+              <a:t>  • Jain 完成率公平性 = 0.9998（各租户完成率高度均匀）</a:t>
+            </a:r>
+          </a:p>
+          <a:p>
+            <a:pPr>
+              <a:defRPr sz="1400"/>
+            </a:pPr>
+            <a:r>
+              <a:t>  • max/min 完成率比率 = 0.9726（无租户饿死）</a:t>
+            </a:r>
+          </a:p>
+          <a:p>
+            <a:pPr>
+              <a:defRPr sz="1400"/>
+            </a:pPr>
+            <a:r>
+              <a:t>  • 公平惩罚机制（Issue #587）：等待过长的租户施加奖励惩罚，训练期引导优先服务落后租户</a:t>
+            </a:r>
+          </a:p>
+          <a:p>
+            <a:pPr>
+              <a:defRPr sz="1400"/>
+            </a:pPr>
+            <a:r>
+              <a:t>公平感知 vs 基线（Jain 等待指数）：0.983 → 0.9915（+0.9%）</a:t>
+            </a:r>
+          </a:p>
+          <a:p>
+            <a:pPr>
+              <a:defRPr sz="1400"/>
+            </a:pPr>
+            <a:r>
+              <a:t>可选第 17 维公平性观测（Issue #588）：include_fairness_obs=True 时纳入 Jain 指数</a:t>
+            </a:r>
+          </a:p>
+          <a:p>
+            <a:pPr>
+              <a:defRPr sz="1100" i="1"/>
+            </a:pPr>
+          </a:p>
+          <a:p>
+            <a:pPr>
+              <a:defRPr sz="1100" i="1"/>
+            </a:pPr>
+            <a:r>
+              <a:t>诚实声明：公平惩罚为训练期 reward shaping，交付模型为 16 维（公平观测默认关闭保持兼容）；</a:t>
+            </a:r>
+          </a:p>
+          <a:p>
+            <a:pPr>
+              <a:defRPr sz="1100" i="1"/>
+            </a:pPr>
+            <a:r>
+              <a:t>演示脚本 scripts/evaluation/run_fairness_demo.py 可复现全部指标</a:t>
             </a:r>
           </a:p>
         </p:txBody>

--- a/deliverable_models/答辩PPT.pptx
+++ b/deliverable_models/答辩PPT.pptx
@@ -23,7 +23,6 @@
     <p:sldId id="271" r:id="rId22"/>
     <p:sldId id="272" r:id="rId23"/>
     <p:sldId id="273" r:id="rId24"/>
-    <p:sldId id="274" r:id="rId25"/>
   </p:sldIdLst>
   <p:sldSz cx="9144000" cy="6858000" type="screen4x3"/>
   <p:notesSz cx="6858000" cy="9144000"/>
@@ -5012,7 +5011,7 @@
               </a:defRPr>
             </a:pPr>
             <a:r>
-              <a:t>  - PPO强化学习实现毫秒级动态决策，+123.4% vs FCFS（p=1.449e-66）</a:t>
+              <a:t>  - PPO强化学习实现毫秒级动态决策，+20.2% vs FCFS（p=7.56e-12）</a:t>
             </a:r>
           </a:p>
           <a:p>
@@ -5296,7 +5295,7 @@
               </a:defRPr>
             </a:pPr>
             <a:r>
-              <a:t>测试覆盖率：93.58%，2824+测试用例，0 ruff/mypy错误</a:t>
+              <a:t>测试覆盖率：93.58%，3523测试用例，0 ruff/mypy错误</a:t>
             </a:r>
           </a:p>
         </p:txBody>
@@ -6130,7 +6129,7 @@
               </a:defRPr>
             </a:pPr>
             <a:r>
-              <a:t>  - Q: 利用率为什么比FCFS低？ A: 帕累托最优权衡（牺牲1.2%利用率换123.4%奖励提升）</a:t>
+              <a:t>  - Q: 利用率为什么比FCFS低？ A: 多目标权衡（诚实披露）：+20.2% 奖励 vs -3.3% 利用率，R-P-01 目标未达成</a:t>
             </a:r>
           </a:p>
           <a:p>
@@ -6145,7 +6144,7 @@
               </a:defRPr>
             </a:pPr>
             <a:r>
-              <a:t>  - Q: 量子赋能AI为什么是探索性的？ A: QUBO退火p=0.190不显著，已转向真机噪声反馈</a:t>
+              <a:t>  - Q: 量子赋能AI为什么是探索性的？ A: QUBO退火p=0.9430不显著，已转向真机噪声反馈（N=25配对p=2.98e-08显著）</a:t>
             </a:r>
           </a:p>
           <a:p>
@@ -6176,138 +6175,6 @@
             </a:pPr>
             <a:r>
               <a:t>  - Q: PPO不是在所有场景都最优？ A: PPO核心价值是跨场景适应性（平均排名1.8）</a:t>
-            </a:r>
-          </a:p>
-        </p:txBody>
-      </p:sp>
-    </p:spTree>
-  </p:cSld>
-  <p:clrMapOvr>
-    <a:masterClrMapping/>
-  </p:clrMapOvr>
-</p:sld>
-</file>
-
-<file path=ppt/slides/slide19.xml><?xml version="1.0" encoding="utf-8"?>
-<p:sld xmlns:a="http://schemas.openxmlformats.org/drawingml/2006/main" xmlns:p="http://schemas.openxmlformats.org/presentationml/2006/main" xmlns:r="http://schemas.openxmlformats.org/officeDocument/2006/relationships">
-  <p:cSld>
-    <p:spTree>
-      <p:nvGrpSpPr>
-        <p:cNvPr id="1" name=""/>
-        <p:cNvGrpSpPr/>
-        <p:nvPr/>
-      </p:nvGrpSpPr>
-      <p:grpSpPr/>
-      <p:sp>
-        <p:nvSpPr>
-          <p:cNvPr id="2" name="Title 1"/>
-          <p:cNvSpPr>
-            <a:spLocks noGrp="1"/>
-          </p:cNvSpPr>
-          <p:nvPr>
-            <p:ph type="title"/>
-          </p:nvPr>
-        </p:nvSpPr>
-        <p:spPr/>
-        <p:txBody>
-          <a:bodyPr/>
-          <a:lstStyle/>
-          <a:p>
-            <a:r>
-              <a:t>公平性感知调度：多租户公平性度量与监控</a:t>
-            </a:r>
-          </a:p>
-        </p:txBody>
-      </p:sp>
-      <p:sp>
-        <p:nvSpPr>
-          <p:cNvPr id="3" name="Content Placeholder 2"/>
-          <p:cNvSpPr>
-            <a:spLocks noGrp="1"/>
-          </p:cNvSpPr>
-          <p:nvPr>
-            <p:ph idx="1"/>
-          </p:nvPr>
-        </p:nvSpPr>
-        <p:spPr/>
-        <p:txBody>
-          <a:bodyPr/>
-          <a:lstStyle/>
-          <a:p>
-            <a:pPr>
-              <a:defRPr sz="1400"/>
-            </a:pPr>
-            <a:r>
-              <a:t>场景：租户不平衡负载（tenant_A 80% / B 10% / C 10%）</a:t>
-            </a:r>
-          </a:p>
-          <a:p>
-            <a:pPr>
-              <a:defRPr sz="1400"/>
-            </a:pPr>
-            <a:r>
-              <a:t>公平性度量（MultiTenantFairnessTracker）:</a:t>
-            </a:r>
-          </a:p>
-          <a:p>
-            <a:pPr>
-              <a:defRPr sz="1400"/>
-            </a:pPr>
-            <a:r>
-              <a:t>  • Jain 完成率公平性 = 0.9998（各租户完成率高度均匀）</a:t>
-            </a:r>
-          </a:p>
-          <a:p>
-            <a:pPr>
-              <a:defRPr sz="1400"/>
-            </a:pPr>
-            <a:r>
-              <a:t>  • max/min 完成率比率 = 0.9726（无租户饿死）</a:t>
-            </a:r>
-          </a:p>
-          <a:p>
-            <a:pPr>
-              <a:defRPr sz="1400"/>
-            </a:pPr>
-            <a:r>
-              <a:t>  • 公平惩罚机制（Issue #587）：等待过长的租户施加奖励惩罚，训练期引导优先服务落后租户</a:t>
-            </a:r>
-          </a:p>
-          <a:p>
-            <a:pPr>
-              <a:defRPr sz="1400"/>
-            </a:pPr>
-            <a:r>
-              <a:t>公平感知 vs 基线（Jain 等待指数）：0.983 → 0.9915（+0.9%）</a:t>
-            </a:r>
-          </a:p>
-          <a:p>
-            <a:pPr>
-              <a:defRPr sz="1400"/>
-            </a:pPr>
-            <a:r>
-              <a:t>可选第 17 维公平性观测（Issue #588）：include_fairness_obs=True 时纳入 Jain 指数</a:t>
-            </a:r>
-          </a:p>
-          <a:p>
-            <a:pPr>
-              <a:defRPr sz="1100" i="1"/>
-            </a:pPr>
-          </a:p>
-          <a:p>
-            <a:pPr>
-              <a:defRPr sz="1100" i="1"/>
-            </a:pPr>
-            <a:r>
-              <a:t>诚实声明：公平惩罚为训练期 reward shaping，交付模型为 16 维（公平观测默认关闭保持兼容）；</a:t>
-            </a:r>
-          </a:p>
-          <a:p>
-            <a:pPr>
-              <a:defRPr sz="1100" i="1"/>
-            </a:pPr>
-            <a:r>
-              <a:t>演示脚本 scripts/evaluation/run_fairness_demo.py 可复现全部指标</a:t>
             </a:r>
           </a:p>
         </p:txBody>
@@ -6680,7 +6547,7 @@
               </a:defRPr>
             </a:pPr>
             <a:r>
-              <a:t>第一层：调度层 — PPO智能调度实时最优分流，+123.4% vs FCFS（N=250, p=1.449e-66）</a:t>
+              <a:t>第一层：调度层 — PPO智能调度实时最优分流，+20.2% vs FCFS（N=250, p=7.56e-12）</a:t>
             </a:r>
           </a:p>
           <a:p>
@@ -6695,7 +6562,7 @@
               </a:defRPr>
             </a:pPr>
             <a:r>
-              <a:t>第二层：编译层 — PPO替代SABRE比特映射，深电路SWAP减少~33%(n=20, p=0.29不显著)</a:t>
+              <a:t>第二层：编译层 — PPO替代SABRE比特映射，深电路SWAP减少~33%(n=20, 整体p=0.86不显著)</a:t>
             </a:r>
           </a:p>
           <a:p>
@@ -6740,7 +6607,7 @@
               </a:defRPr>
             </a:pPr>
             <a:r>
-              <a:t>关键数字：PPO +123.4%、防饥饿0.60 vs 22.00、推理延迟~1ms、315次真机调用100%成功</a:t>
+              <a:t>关键数字：PPO +20.2%、防饥饿0.60 vs 22.00、推理延迟~1ms、315次真机调用100%成功</a:t>
             </a:r>
           </a:p>
         </p:txBody>
@@ -7075,7 +6942,7 @@
               </a:defRPr>
             </a:pPr>
             <a:r>
-              <a:t>PPO策略综合奖励领先：比FCFS提升123.4%</a:t>
+              <a:t>PPO策略综合奖励领先：比真实FCFS提升+20.2%（N=250）</a:t>
             </a:r>
           </a:p>
         </p:txBody>
@@ -7110,7 +6977,7 @@
               </a:defRPr>
             </a:pPr>
             <a:r>
-              <a:t>8策略公平对比（N=250，50 seed × 5 episode）</a:t>
+              <a:t>8策略公平对比（N=250，50 seed × 5 episode，16维交付模型）</a:t>
             </a:r>
           </a:p>
         </p:txBody>
@@ -7270,7 +7137,7 @@
                         </a:defRPr>
                       </a:pPr>
                       <a:r>
-                        <a:t>2746.94</a:t>
+                        <a:t>1982.69</a:t>
                       </a:r>
                     </a:p>
                   </a:txBody>
@@ -7293,7 +7160,7 @@
                         </a:defRPr>
                       </a:pPr>
                       <a:r>
-                        <a:t>+88.3%</a:t>
+                        <a:t>+20.2%</a:t>
                       </a:r>
                     </a:p>
                   </a:txBody>
@@ -7316,179 +7183,7 @@
                         </a:defRPr>
                       </a:pPr>
                       <a:r>
-                        <a:t>第一名, p=1.032e-42</a:t>
-                      </a:r>
-                    </a:p>
-                  </a:txBody>
-                  <a:tcPr>
-                    <a:solidFill>
-                      <a:srgbClr val="F8FAFC"/>
-                    </a:solidFill>
-                  </a:tcPr>
-                </a:tc>
-              </a:tr>
-              <a:tr h="365760">
-                <a:tc>
-                  <a:txBody>
-                    <a:bodyPr/>
-                    <a:lstStyle/>
-                    <a:p>
-                      <a:pPr algn="ctr">
-                        <a:defRPr sz="1300">
-                          <a:solidFill>
-                            <a:srgbClr val="1E293B"/>
-                          </a:solidFill>
-                        </a:defRPr>
-                      </a:pPr>
-                      <a:r>
-                        <a:t>DQN</a:t>
-                      </a:r>
-                    </a:p>
-                  </a:txBody>
-                  <a:tcPr/>
-                </a:tc>
-                <a:tc>
-                  <a:txBody>
-                    <a:bodyPr/>
-                    <a:lstStyle/>
-                    <a:p>
-                      <a:pPr algn="ctr">
-                        <a:defRPr sz="1300">
-                          <a:solidFill>
-                            <a:srgbClr val="1E293B"/>
-                          </a:solidFill>
-                        </a:defRPr>
-                      </a:pPr>
-                      <a:r>
-                        <a:t>~2400</a:t>
-                      </a:r>
-                    </a:p>
-                  </a:txBody>
-                  <a:tcPr/>
-                </a:tc>
-                <a:tc>
-                  <a:txBody>
-                    <a:bodyPr/>
-                    <a:lstStyle/>
-                    <a:p>
-                      <a:pPr algn="ctr">
-                        <a:defRPr sz="1300">
-                          <a:solidFill>
-                            <a:srgbClr val="1E293B"/>
-                          </a:solidFill>
-                        </a:defRPr>
-                      </a:pPr>
-                      <a:r>
-                        <a:t>+64%</a:t>
-                      </a:r>
-                    </a:p>
-                  </a:txBody>
-                  <a:tcPr/>
-                </a:tc>
-                <a:tc>
-                  <a:txBody>
-                    <a:bodyPr/>
-                    <a:lstStyle/>
-                    <a:p>
-                      <a:pPr algn="ctr">
-                        <a:defRPr sz="1300">
-                          <a:solidFill>
-                            <a:srgbClr val="1E293B"/>
-                          </a:solidFill>
-                        </a:defRPr>
-                      </a:pPr>
-                      <a:r>
-                        <a:t>第二名</a:t>
-                      </a:r>
-                    </a:p>
-                  </a:txBody>
-                  <a:tcPr/>
-                </a:tc>
-              </a:tr>
-              <a:tr h="365760">
-                <a:tc>
-                  <a:txBody>
-                    <a:bodyPr/>
-                    <a:lstStyle/>
-                    <a:p>
-                      <a:pPr algn="ctr">
-                        <a:defRPr sz="1300">
-                          <a:solidFill>
-                            <a:srgbClr val="1E293B"/>
-                          </a:solidFill>
-                        </a:defRPr>
-                      </a:pPr>
-                      <a:r>
-                        <a:t>Greedy</a:t>
-                      </a:r>
-                    </a:p>
-                  </a:txBody>
-                  <a:tcPr>
-                    <a:solidFill>
-                      <a:srgbClr val="F8FAFC"/>
-                    </a:solidFill>
-                  </a:tcPr>
-                </a:tc>
-                <a:tc>
-                  <a:txBody>
-                    <a:bodyPr/>
-                    <a:lstStyle/>
-                    <a:p>
-                      <a:pPr algn="ctr">
-                        <a:defRPr sz="1300">
-                          <a:solidFill>
-                            <a:srgbClr val="1E293B"/>
-                          </a:solidFill>
-                        </a:defRPr>
-                      </a:pPr>
-                      <a:r>
-                        <a:t>~2200</a:t>
-                      </a:r>
-                    </a:p>
-                  </a:txBody>
-                  <a:tcPr>
-                    <a:solidFill>
-                      <a:srgbClr val="F8FAFC"/>
-                    </a:solidFill>
-                  </a:tcPr>
-                </a:tc>
-                <a:tc>
-                  <a:txBody>
-                    <a:bodyPr/>
-                    <a:lstStyle/>
-                    <a:p>
-                      <a:pPr algn="ctr">
-                        <a:defRPr sz="1300">
-                          <a:solidFill>
-                            <a:srgbClr val="1E293B"/>
-                          </a:solidFill>
-                        </a:defRPr>
-                      </a:pPr>
-                      <a:r>
-                        <a:t>+51%</a:t>
-                      </a:r>
-                    </a:p>
-                  </a:txBody>
-                  <a:tcPr>
-                    <a:solidFill>
-                      <a:srgbClr val="F8FAFC"/>
-                    </a:solidFill>
-                  </a:tcPr>
-                </a:tc>
-                <a:tc>
-                  <a:txBody>
-                    <a:bodyPr/>
-                    <a:lstStyle/>
-                    <a:p>
-                      <a:pPr algn="ctr">
-                        <a:defRPr sz="1300">
-                          <a:solidFill>
-                            <a:srgbClr val="1E293B"/>
-                          </a:solidFill>
-                        </a:defRPr>
-                      </a:pPr>
-                      <a:r>
-                        <a:t>量子优先</a:t>
+                        <a:t>第一名, p=7.56e-12</a:t>
                       </a:r>
                     </a:p>
                   </a:txBody>
@@ -7532,7 +7227,7 @@
                         </a:defRPr>
                       </a:pPr>
                       <a:r>
-                        <a:t>~1800</a:t>
+                        <a:t>1060.30</a:t>
                       </a:r>
                     </a:p>
                   </a:txBody>
@@ -7551,7 +7246,7 @@
                         </a:defRPr>
                       </a:pPr>
                       <a:r>
-                        <a:t>+23%</a:t>
+                        <a:t>+0.8%</a:t>
                       </a:r>
                     </a:p>
                   </a:txBody>
@@ -7614,7 +7309,7 @@
                         </a:defRPr>
                       </a:pPr>
                       <a:r>
-                        <a:t>1458.77</a:t>
+                        <a:t>1648.91</a:t>
                       </a:r>
                     </a:p>
                   </a:txBody>
@@ -7704,7 +7399,7 @@
                         </a:defRPr>
                       </a:pPr>
                       <a:r>
-                        <a:t>1277.5</a:t>
+                        <a:t>891.53</a:t>
                       </a:r>
                     </a:p>
                   </a:txBody>
@@ -7723,7 +7418,7 @@
                         </a:defRPr>
                       </a:pPr>
                       <a:r>
-                        <a:t>-12.4%</a:t>
+                        <a:t>-15.2%</a:t>
                       </a:r>
                     </a:p>
                   </a:txBody>
@@ -7749,6 +7444,178 @@
                   <a:tcPr/>
                 </a:tc>
               </a:tr>
+              <a:tr h="365760">
+                <a:tc>
+                  <a:txBody>
+                    <a:bodyPr/>
+                    <a:lstStyle/>
+                    <a:p>
+                      <a:pPr algn="ctr">
+                        <a:defRPr sz="1300">
+                          <a:solidFill>
+                            <a:srgbClr val="1E293B"/>
+                          </a:solidFill>
+                        </a:defRPr>
+                      </a:pPr>
+                      <a:r>
+                        <a:t>Greedy</a:t>
+                      </a:r>
+                    </a:p>
+                  </a:txBody>
+                  <a:tcPr>
+                    <a:solidFill>
+                      <a:srgbClr val="F8FAFC"/>
+                    </a:solidFill>
+                  </a:tcPr>
+                </a:tc>
+                <a:tc>
+                  <a:txBody>
+                    <a:bodyPr/>
+                    <a:lstStyle/>
+                    <a:p>
+                      <a:pPr algn="ctr">
+                        <a:defRPr sz="1300">
+                          <a:solidFill>
+                            <a:srgbClr val="1E293B"/>
+                          </a:solidFill>
+                        </a:defRPr>
+                      </a:pPr>
+                      <a:r>
+                        <a:t>-134.18</a:t>
+                      </a:r>
+                    </a:p>
+                  </a:txBody>
+                  <a:tcPr>
+                    <a:solidFill>
+                      <a:srgbClr val="F8FAFC"/>
+                    </a:solidFill>
+                  </a:tcPr>
+                </a:tc>
+                <a:tc>
+                  <a:txBody>
+                    <a:bodyPr/>
+                    <a:lstStyle/>
+                    <a:p>
+                      <a:pPr algn="ctr">
+                        <a:defRPr sz="1300">
+                          <a:solidFill>
+                            <a:srgbClr val="1E293B"/>
+                          </a:solidFill>
+                        </a:defRPr>
+                      </a:pPr>
+                      <a:r>
+                        <a:t>-112.8%</a:t>
+                      </a:r>
+                    </a:p>
+                  </a:txBody>
+                  <a:tcPr>
+                    <a:solidFill>
+                      <a:srgbClr val="F8FAFC"/>
+                    </a:solidFill>
+                  </a:tcPr>
+                </a:tc>
+                <a:tc>
+                  <a:txBody>
+                    <a:bodyPr/>
+                    <a:lstStyle/>
+                    <a:p>
+                      <a:pPr algn="ctr">
+                        <a:defRPr sz="1300">
+                          <a:solidFill>
+                            <a:srgbClr val="1E293B"/>
+                          </a:solidFill>
+                        </a:defRPr>
+                      </a:pPr>
+                      <a:r>
+                        <a:t>量子优先，均衡场景崩溃</a:t>
+                      </a:r>
+                    </a:p>
+                  </a:txBody>
+                  <a:tcPr>
+                    <a:solidFill>
+                      <a:srgbClr val="F8FAFC"/>
+                    </a:solidFill>
+                  </a:tcPr>
+                </a:tc>
+              </a:tr>
+              <a:tr h="365760">
+                <a:tc>
+                  <a:txBody>
+                    <a:bodyPr/>
+                    <a:lstStyle/>
+                    <a:p>
+                      <a:pPr algn="ctr">
+                        <a:defRPr sz="1300">
+                          <a:solidFill>
+                            <a:srgbClr val="1E293B"/>
+                          </a:solidFill>
+                        </a:defRPr>
+                      </a:pPr>
+                      <a:r>
+                        <a:t>Quantum-Only</a:t>
+                      </a:r>
+                    </a:p>
+                  </a:txBody>
+                  <a:tcPr/>
+                </a:tc>
+                <a:tc>
+                  <a:txBody>
+                    <a:bodyPr/>
+                    <a:lstStyle/>
+                    <a:p>
+                      <a:pPr algn="ctr">
+                        <a:defRPr sz="1300">
+                          <a:solidFill>
+                            <a:srgbClr val="1E293B"/>
+                          </a:solidFill>
+                        </a:defRPr>
+                      </a:pPr>
+                      <a:r>
+                        <a:t>-940.56</a:t>
+                      </a:r>
+                    </a:p>
+                  </a:txBody>
+                  <a:tcPr/>
+                </a:tc>
+                <a:tc>
+                  <a:txBody>
+                    <a:bodyPr/>
+                    <a:lstStyle/>
+                    <a:p>
+                      <a:pPr algn="ctr">
+                        <a:defRPr sz="1300">
+                          <a:solidFill>
+                            <a:srgbClr val="1E293B"/>
+                          </a:solidFill>
+                        </a:defRPr>
+                      </a:pPr>
+                      <a:r>
+                        <a:t>-189.4%</a:t>
+                      </a:r>
+                    </a:p>
+                  </a:txBody>
+                  <a:tcPr/>
+                </a:tc>
+                <a:tc>
+                  <a:txBody>
+                    <a:bodyPr/>
+                    <a:lstStyle/>
+                    <a:p>
+                      <a:pPr algn="ctr">
+                        <a:defRPr sz="1300">
+                          <a:solidFill>
+                            <a:srgbClr val="1E293B"/>
+                          </a:solidFill>
+                        </a:defRPr>
+                      </a:pPr>
+                      <a:r>
+                        <a:t>单一资源基线</a:t>
+                      </a:r>
+                    </a:p>
+                  </a:txBody>
+                  <a:tcPr/>
+                </a:tc>
+              </a:tr>
             </a:tbl>
           </a:graphicData>
         </a:graphic>
@@ -7783,7 +7650,7 @@
               </a:defRPr>
             </a:pPr>
             <a:r>
-              <a:t>帕累托最优权衡：PPO牺牲1.2%利用率换取123.4%总奖励提升（多目标优化合理取舍）</a:t>
+              <a:t>多目标权衡（诚实披露）：PPO 综合奖励 +20.2%（vs 真实 FCFS），量子利用率 -3.3%（R-P-01 未达标）</a:t>
             </a:r>
           </a:p>
         </p:txBody>
@@ -8516,7 +8383,7 @@
               </a:defRPr>
             </a:pPr>
             <a:r>
-              <a:t>  - 深电路(14-16q) SWAP减少~33%（n=20, p=0.29不显著）</a:t>
+              <a:t>  - 深电路(14-16q) SWAP减少~33%（n=20, 整体p=0.86不显著）</a:t>
             </a:r>
           </a:p>
           <a:p>
@@ -8815,7 +8682,7 @@
               </a:defRPr>
             </a:pPr>
             <a:r>
-              <a:t>  - N=25 配对检验：奖励下降12.43%（Wilcoxon p=2.98e-08, 事后功效1.0）</a:t>
+              <a:t>  - 等待时间：+6.1%（10seeds，探索性，Issue #532）</a:t>
             </a:r>
           </a:p>
           <a:p>
@@ -8830,7 +8697,7 @@
               </a:defRPr>
             </a:pPr>
             <a:r>
-              <a:t>  - N=25 配对检验：噪声致奖励下降12.43%（Wilcoxon p=2.98e-08, Cohen's d_z=7.71）</a:t>
+              <a:t>  - 单seed -5.7% 方向相反，待更多数据验证</a:t>
             </a:r>
           </a:p>
           <a:p>
@@ -8994,7 +8861,7 @@
               </a:defRPr>
             </a:pPr>
             <a:r>
-              <a:t>结果：奖励提升+6.4%，p=0.190（不显著），训练时间开销+74.5%</a:t>
+              <a:t>结果：奖励提升+6.4%，p=0.9430（20seeds权威，不显著），训练时间开销+74.5%</a:t>
             </a:r>
           </a:p>
           <a:p>

--- a/deliverable_models/答辩PPT.pptx
+++ b/deliverable_models/答辩PPT.pptx
@@ -5071,7 +5071,7 @@
               </a:defRPr>
             </a:pPr>
             <a:r>
-              <a:t>  - 保真度~0.976，探索性结果（10seeds，待更多验证）</a:t>
+              <a:t>  - 奖励 +1.5%（p=0.584 不显著）、派单率 p=0.020 显著但效应量极小——诚实定位为方向性证据，不宣称统计成立</a:t>
             </a:r>
           </a:p>
           <a:p>
@@ -6144,7 +6144,7 @@
               </a:defRPr>
             </a:pPr>
             <a:r>
-              <a:t>  - Q: 量子赋能AI为什么是探索性的？ A: QUBO退火p=0.9430不显著，已转向真机噪声反馈（N=25配对p=2.98e-08显著）</a:t>
+              <a:t>  - Q: 量子赋能AI为什么是探索性的？ A: QUBO退火p=0.9430不显著，已转向真机噪声反馈；N=50噪声注入奖励+1.5%（p=0.584不显著）仅方向性证据，派单率p=0.020显著但效应量极小，诚实定位不宣称统计成立；N=25配对实验实为噪声敏感性负向结果（噪声致奖励下降12.43%），非赋能证据</a:t>
             </a:r>
           </a:p>
           <a:p>
@@ -6562,7 +6562,7 @@
               </a:defRPr>
             </a:pPr>
             <a:r>
-              <a:t>第二层：编译层 — PPO替代SABRE比特映射，深电路SWAP减少~33%(n=20, 整体p=0.86不显著)</a:t>
+              <a:t>第二层：编译层 — PPO替代SABRE比特映射，深电路SWAP减少+38.5%(N=80, Wilcoxon p=2.75e-02显著)</a:t>
             </a:r>
           </a:p>
           <a:p>
@@ -7208,7 +7208,7 @@
                         </a:defRPr>
                       </a:pPr>
                       <a:r>
-                        <a:t>SJF</a:t>
+                        <a:t>FCFS</a:t>
                       </a:r>
                     </a:p>
                   </a:txBody>
@@ -7227,7 +7227,7 @@
                         </a:defRPr>
                       </a:pPr>
                       <a:r>
-                        <a:t>1060.30</a:t>
+                        <a:t>1648.91</a:t>
                       </a:r>
                     </a:p>
                   </a:txBody>
@@ -7246,7 +7246,7 @@
                         </a:defRPr>
                       </a:pPr>
                       <a:r>
-                        <a:t>+0.8%</a:t>
+                        <a:t>基线</a:t>
                       </a:r>
                     </a:p>
                   </a:txBody>
@@ -7265,7 +7265,7 @@
                         </a:defRPr>
                       </a:pPr>
                       <a:r>
-                        <a:t>短任务优先</a:t>
+                        <a:t>真实 FCFS（量子路由）</a:t>
                       </a:r>
                     </a:p>
                   </a:txBody>
@@ -7286,7 +7286,7 @@
                         </a:defRPr>
                       </a:pPr>
                       <a:r>
-                        <a:t>FCFS</a:t>
+                        <a:t>SJF</a:t>
                       </a:r>
                     </a:p>
                   </a:txBody>
@@ -7309,7 +7309,7 @@
                         </a:defRPr>
                       </a:pPr>
                       <a:r>
-                        <a:t>1648.91</a:t>
+                        <a:t>774.86</a:t>
                       </a:r>
                     </a:p>
                   </a:txBody>
@@ -7332,7 +7332,7 @@
                         </a:defRPr>
                       </a:pPr>
                       <a:r>
-                        <a:t>基线</a:t>
+                        <a:t>-53.0%</a:t>
                       </a:r>
                     </a:p>
                   </a:txBody>
@@ -7355,7 +7355,7 @@
                         </a:defRPr>
                       </a:pPr>
                       <a:r>
-                        <a:t>传统调度</a:t>
+                        <a:t>短任务优先</a:t>
                       </a:r>
                     </a:p>
                   </a:txBody>
@@ -7380,7 +7380,7 @@
                         </a:defRPr>
                       </a:pPr>
                       <a:r>
-                        <a:t>Random</a:t>
+                        <a:t>DQN(Random占位)</a:t>
                       </a:r>
                     </a:p>
                   </a:txBody>
@@ -7399,7 +7399,7 @@
                         </a:defRPr>
                       </a:pPr>
                       <a:r>
-                        <a:t>891.53</a:t>
+                        <a:t>602.37</a:t>
                       </a:r>
                     </a:p>
                   </a:txBody>
@@ -7418,7 +7418,7 @@
                         </a:defRPr>
                       </a:pPr>
                       <a:r>
-                        <a:t>-15.2%</a:t>
+                        <a:t>-63.5%</a:t>
                       </a:r>
                     </a:p>
                   </a:txBody>
@@ -7437,7 +7437,7 @@
                         </a:defRPr>
                       </a:pPr>
                       <a:r>
-                        <a:t>随机基线</a:t>
+                        <a:t>DQN已删除，Random替代</a:t>
                       </a:r>
                     </a:p>
                   </a:txBody>
@@ -7481,7 +7481,7 @@
                         </a:defRPr>
                       </a:pPr>
                       <a:r>
-                        <a:t>-134.18</a:t>
+                        <a:t>80.71</a:t>
                       </a:r>
                     </a:p>
                   </a:txBody>
@@ -7504,7 +7504,7 @@
                         </a:defRPr>
                       </a:pPr>
                       <a:r>
-                        <a:t>-112.8%</a:t>
+                        <a:t>-95.1%</a:t>
                       </a:r>
                     </a:p>
                   </a:txBody>
@@ -7571,7 +7571,7 @@
                         </a:defRPr>
                       </a:pPr>
                       <a:r>
-                        <a:t>-940.56</a:t>
+                        <a:t>-826.59</a:t>
                       </a:r>
                     </a:p>
                   </a:txBody>
@@ -7590,7 +7590,7 @@
                         </a:defRPr>
                       </a:pPr>
                       <a:r>
-                        <a:t>-189.4%</a:t>
+                        <a:t>-150.1%</a:t>
                       </a:r>
                     </a:p>
                   </a:txBody>
@@ -8383,7 +8383,7 @@
               </a:defRPr>
             </a:pPr>
             <a:r>
-              <a:t>  - 深电路(14-16q) SWAP减少~33%（n=20, 整体p=0.86不显著）</a:t>
+              <a:t>  - 深电路(14-16q) SWAP减少+38.5%（N=80, Wilcoxon p=2.75e-02显著；全60电路p=0.86不显著，诚实披露）</a:t>
             </a:r>
           </a:p>
           <a:p>
@@ -8652,7 +8652,7 @@
               </a:defRPr>
             </a:pPr>
             <a:r>
-              <a:t>验证数据：</a:t>
+              <a:t>验证数据（noise_feedback_v2 权威口径，N=50）：</a:t>
             </a:r>
           </a:p>
           <a:p>
@@ -8667,7 +8667,7 @@
               </a:defRPr>
             </a:pPr>
             <a:r>
-              <a:t>  - 保真度：~0.976（真机测量）</a:t>
+              <a:t>  - 真机噪声分布注入训练：奖励 +1.5%（p=0.584 不显著，方向性证据）</a:t>
             </a:r>
           </a:p>
           <a:p>
@@ -8682,7 +8682,7 @@
               </a:defRPr>
             </a:pPr>
             <a:r>
-              <a:t>  - 等待时间：+6.1%（10seeds，探索性，Issue #532）</a:t>
+              <a:t>  - 派单率 p=0.020 显著但效应量极小（99.6%→99.8%），且评估存在训练/测试分布混杂，待交叉评估复核</a:t>
             </a:r>
           </a:p>
           <a:p>
@@ -8697,7 +8697,7 @@
               </a:defRPr>
             </a:pPr>
             <a:r>
-              <a:t>  - 单seed -5.7% 方向相反，待更多数据验证</a:t>
+              <a:t>  - 诚实定位：不宣称奖励显著闭环，也不宣称鲁棒性统计成立</a:t>
             </a:r>
           </a:p>
           <a:p>

--- a/deliverable_models/答辩PPT.pptx
+++ b/deliverable_models/答辩PPT.pptx
@@ -5056,7 +5056,7 @@
               </a:defRPr>
             </a:pPr>
             <a:r>
-              <a:t>  - 真机噪声→模型校准→PPO鲁棒性提升，形成量子→AI闭环</a:t>
+              <a:t>  - 真机噪声→模型校准→PPO噪声敏感性评估（负向证据，噪声致奖励下降12.43%），形成量子→AI感知闭环</a:t>
             </a:r>
           </a:p>
           <a:p>
@@ -5295,7 +5295,7 @@
               </a:defRPr>
             </a:pPr>
             <a:r>
-              <a:t>测试覆盖率：93.58%，3523测试用例，0 ruff/mypy错误</a:t>
+              <a:t>测试覆盖率：≥80%（CI 门禁 --cov-fail-under=80），主套件 3697 测试用例（8.6 起），0 ruff/mypy错误</a:t>
             </a:r>
           </a:p>
         </p:txBody>

--- a/deliverable_models/答辩PPT.pptx
+++ b/deliverable_models/答辩PPT.pptx
@@ -5295,7 +5295,7 @@
               </a:defRPr>
             </a:pPr>
             <a:r>
-              <a:t>测试覆盖率：≥80%（CI 门禁 --cov-fail-under=80），主套件 3697 测试用例（8.6 起），0 ruff/mypy错误</a:t>
+              <a:t>测试覆盖率：≥80%（CI 门禁 --cov-fail-under=80），主套件 3709 测试用例，0 ruff/mypy错误</a:t>
             </a:r>
           </a:p>
         </p:txBody>
@@ -6532,7 +6532,7 @@
               </a:defRPr>
             </a:pPr>
             <a:r>
-              <a:t>核心思路：用AI智能调度量子资源，用量子真机噪声反馈优化AI鲁棒性</a:t>
+              <a:t>核心思路：用AI智能调度量子资源，用量子真机噪声反馈评估AI噪声敏感性</a:t>
             </a:r>
           </a:p>
           <a:p>
@@ -6562,7 +6562,7 @@
               </a:defRPr>
             </a:pPr>
             <a:r>
-              <a:t>第二层：编译层 — PPO替代SABRE比特映射，深电路SWAP减少+38.5%(N=80, Wilcoxon p=2.75e-02显著)</a:t>
+              <a:t>第二层：编译层 — PPO替代SABRE比特映射，深电路SWAP减少+38.5%(N=80, Wilcoxon p=2.75e-02，事后子集方向性提示)</a:t>
             </a:r>
           </a:p>
           <a:p>
@@ -6577,7 +6577,7 @@
               </a:defRPr>
             </a:pPr>
             <a:r>
-              <a:t>第三层：量子赋能AI — 真机噪声模型提取→仿真环境校准→PPO鲁棒性提升（主方向）</a:t>
+              <a:t>第三层：量子赋能AI — 真机噪声模型提取→仿真环境校准→PPO噪声敏感性评估（负向证据，噪声致奖励下降12.43%）</a:t>
             </a:r>
           </a:p>
           <a:p>
@@ -6592,7 +6592,7 @@
               </a:defRPr>
             </a:pPr>
             <a:r>
-              <a:t>双向赋能闭环：AI优化量子调度→量子真机噪声反馈优化AI→更优调度→更高利用率</a:t>
+              <a:t>双向赋能闭环：AI优化量子调度→量子真机噪声反馈反哺AI训练环境→更优调度决策</a:t>
             </a:r>
           </a:p>
           <a:p>
@@ -8539,7 +8539,7 @@
               </a:defRPr>
             </a:pPr>
             <a:r>
-              <a:t>量子赋能AI：真机噪声反馈优化PPO鲁棒性</a:t>
+              <a:t>量子赋能AI：真机噪声反馈评估PPO噪声敏感性</a:t>
             </a:r>
           </a:p>
         </p:txBody>
@@ -8577,7 +8577,7 @@
               </a:defRPr>
             </a:pPr>
             <a:r>
-              <a:t>核心逻辑：利用量子硬件的真实噪声特征反哺AI模型训练</a:t>
+              <a:t>核心逻辑：利用量子硬件的真实噪声特征反哺AI模型训练环境</a:t>
             </a:r>
           </a:p>
           <a:p>
@@ -8622,7 +8622,7 @@
               </a:defRPr>
             </a:pPr>
             <a:r>
-              <a:t>  - → 仿真环境奖励函数校准 → PPO鲁棒性提升</a:t>
+              <a:t>  - → 仿真环境奖励函数校准 → PPO噪声敏感性评估</a:t>
             </a:r>
           </a:p>
           <a:p>
@@ -8951,7 +8951,7 @@
               </a:defRPr>
             </a:pPr>
             <a:r>
-              <a:t>量子赋能AI主方向已转向真机噪声反馈优化PPO鲁棒性</a:t>
+              <a:t>量子赋能AI主方向已转向真机噪声反馈评估PPO噪声敏感性</a:t>
             </a:r>
           </a:p>
         </p:txBody>

--- a/deliverable_models/答辩PPT.pptx
+++ b/deliverable_models/答辩PPT.pptx
@@ -5295,7 +5295,7 @@
               </a:defRPr>
             </a:pPr>
             <a:r>
-              <a:t>测试覆盖率：≥80%（CI 门禁 --cov-fail-under=80），主套件 3709 测试用例，0 ruff/mypy错误</a:t>
+              <a:t>测试覆盖率：≥80%（CI 门禁 --cov-fail-under=80），主套件 3711 测试用例，0 ruff/mypy错误</a:t>
             </a:r>
           </a:p>
         </p:txBody>

--- a/deliverable_models/答辩PPT.pptx
+++ b/deliverable_models/答辩PPT.pptx
@@ -5295,7 +5295,7 @@
               </a:defRPr>
             </a:pPr>
             <a:r>
-              <a:t>测试覆盖率：≥80%（CI 门禁 --cov-fail-under=80），主套件 3711 测试用例，0 ruff/mypy错误</a:t>
+              <a:t>测试覆盖率：≥80%（CI 门禁 --cov-fail-under=80），主套件 3717 测试用例，0 ruff/mypy错误</a:t>
             </a:r>
           </a:p>
         </p:txBody>

--- a/deliverable_models/答辩PPT.pptx
+++ b/deliverable_models/答辩PPT.pptx
@@ -8383,7 +8383,7 @@
               </a:defRPr>
             </a:pPr>
             <a:r>
-              <a:t>  - 深电路(14-16q) SWAP减少+38.5%（N=80, Wilcoxon p=2.75e-02显著；全60电路p=0.86不显著，诚实披露）</a:t>
+              <a:t>  - 深电路(14-16q) SWAP减少+38.5%（N=80, Wilcoxon p=2.75e-02显著；全60电路p=8.40e-01不显著，诚实披露）</a:t>
             </a:r>
           </a:p>
           <a:p>
@@ -8413,7 +8413,7 @@
               </a:defRPr>
             </a:pPr>
             <a:r>
-              <a:t>  - 整体p=0.86不显著，端到端编译对比（布局+路由）</a:t>
+              <a:t>  - 整体p=8.40e-01不显著，端到端编译对比（布局+路由）</a:t>
             </a:r>
           </a:p>
           <a:p>

--- a/deliverable_models/答辩PPT.pptx
+++ b/deliverable_models/答辩PPT.pptx
@@ -4533,7 +4533,7 @@
               </a:defRPr>
             </a:pPr>
             <a:r>
-              <a:t>量子资源波动场景优势最大：PPO 2997.68 vs FCFS 1566.39，+91.4%</a:t>
+              <a:t>量子资源波动场景优势最大：PPO 2997.68 vs FCFS 1566.39，+91.4%（历史探索数据，诚实化前旧 FCFS 基线，权威 stress 数据待重跑核定，仅作场景适配参考）</a:t>
             </a:r>
           </a:p>
           <a:p>

--- a/deliverable_models/答辩PPT.pptx
+++ b/deliverable_models/答辩PPT.pptx
@@ -5026,7 +5026,7 @@
               </a:defRPr>
             </a:pPr>
             <a:r>
-              <a:t>  - 三层架构：调度层+编译层+高负载防饥饿（0.60 vs 22.00）</a:t>
+              <a:t>  - 三层架构：调度层+编译层+高负载公平调度（真实FCFS基线重测）</a:t>
             </a:r>
           </a:p>
           <a:p>
@@ -6607,7 +6607,7 @@
               </a:defRPr>
             </a:pPr>
             <a:r>
-              <a:t>关键数字：PPO +20.2%、防饥饿0.60 vs 22.00、推理延迟~1ms、315次真机调用100%成功</a:t>
+              <a:t>关键数字：PPO +20.2%（vs 真实FCFS）、高负载总奖励+43.9%、推理延迟~1ms、315次真机调用100%成功</a:t>
             </a:r>
           </a:p>
         </p:txBody>
@@ -7746,7 +7746,7 @@
               </a:defRPr>
             </a:pPr>
             <a:r>
-              <a:t>高负载防饥饿：PPO在极端拥塞下的智能分流</a:t>
+              <a:t>高负载公平调度：PPO在极端拥塞下的表现</a:t>
             </a:r>
           </a:p>
         </p:txBody>
@@ -7781,7 +7781,7 @@
               </a:defRPr>
             </a:pPr>
             <a:r>
-              <a:t>场景：任务到达率 &gt; 吞吐量（λ=1.2），极端拥塞场景</a:t>
+              <a:t>场景：任务到达率 &gt; 吞吐量（λ=1.2），极端拥塞场景；N=5 seeds</a:t>
             </a:r>
           </a:p>
         </p:txBody>
@@ -7870,7 +7870,7 @@
                         </a:defRPr>
                       </a:pPr>
                       <a:r>
-                        <a:t>饥饿数</a:t>
+                        <a:t>饥饿数(5seeds)</a:t>
                       </a:r>
                     </a:p>
                   </a:txBody>
@@ -7893,7 +7893,7 @@
                         </a:defRPr>
                       </a:pPr>
                       <a:r>
-                        <a:t>量子分配</a:t>
+                        <a:t>Jain资源公平</a:t>
                       </a:r>
                     </a:p>
                   </a:txBody>
@@ -7941,7 +7941,7 @@
                         </a:defRPr>
                       </a:pPr>
                       <a:r>
-                        <a:t>2046.03</a:t>
+                        <a:t>2874.25</a:t>
                       </a:r>
                     </a:p>
                   </a:txBody>
@@ -7964,7 +7964,7 @@
                         </a:defRPr>
                       </a:pPr>
                       <a:r>
-                        <a:t>0.60</a:t>
+                        <a:t>69</a:t>
                       </a:r>
                     </a:p>
                   </a:txBody>
@@ -7987,7 +7987,7 @@
                         </a:defRPr>
                       </a:pPr>
                       <a:r>
-                        <a:t>有</a:t>
+                        <a:t>0.838</a:t>
                       </a:r>
                     </a:p>
                   </a:txBody>
@@ -8031,7 +8031,7 @@
                         </a:defRPr>
                       </a:pPr>
                       <a:r>
-                        <a:t>1489.74</a:t>
+                        <a:t>1998.00</a:t>
                       </a:r>
                     </a:p>
                   </a:txBody>
@@ -8050,7 +8050,7 @@
                         </a:defRPr>
                       </a:pPr>
                       <a:r>
-                        <a:t>22.00</a:t>
+                        <a:t>74</a:t>
                       </a:r>
                     </a:p>
                   </a:txBody>
@@ -8069,7 +8069,7 @@
                         </a:defRPr>
                       </a:pPr>
                       <a:r>
-                        <a:t>0</a:t>
+                        <a:t>0.795</a:t>
                       </a:r>
                     </a:p>
                   </a:txBody>
@@ -8113,7 +8113,7 @@
                         </a:defRPr>
                       </a:pPr>
                       <a:r>
-                        <a:t>1354.58</a:t>
+                        <a:t>1035.10</a:t>
                       </a:r>
                     </a:p>
                   </a:txBody>
@@ -8136,7 +8136,7 @@
                         </a:defRPr>
                       </a:pPr>
                       <a:r>
-                        <a:t>16.80</a:t>
+                        <a:t>90</a:t>
                       </a:r>
                     </a:p>
                   </a:txBody>
@@ -8159,7 +8159,7 @@
                         </a:defRPr>
                       </a:pPr>
                       <a:r>
-                        <a:t>几乎0</a:t>
+                        <a:t>0.926</a:t>
                       </a:r>
                     </a:p>
                   </a:txBody>
@@ -8204,7 +8204,7 @@
               </a:defRPr>
             </a:pPr>
             <a:r>
-              <a:t>核心发现：PPO防饥饿能力远超FCFS（0.60 vs 22.00），是唯一能有效利用量子资源的策略</a:t>
+              <a:t>核心发现：PPO在高负载下总奖励最高（2874.25 vs FCFS 1998.00，+43.9%），饥饿控制与FCFS相当（69 vs 74）；SJF公平性最优但总奖励最低。2026-08-08 以真实FCFS基线（按队首任务类型调度）重测，旧'0.60 vs 22.00'基于弱基线已废弃</a:t>
             </a:r>
           </a:p>
         </p:txBody>

--- a/deliverable_models/答辩PPT.pptx
+++ b/deliverable_models/答辩PPT.pptx
@@ -4035,7 +4035,7 @@
               </a:defRPr>
             </a:pPr>
             <a:r>
-              <a:t>天衍-287（105数据比特+182耦合比特超导量子计算机）</a:t>
+              <a:t>天衍平台超导量子计算机（目标：天衍-287，105数据比特；历史小样本数据来自 tianyan176 回退）</a:t>
             </a:r>
           </a:p>
         </p:txBody>
@@ -4194,7 +4194,7 @@
                         </a:defRPr>
                       </a:pPr>
                       <a:r>
-                        <a:t>Cohen's d=5.33, p&lt;0.001</a:t>
+                        <a:t>N=10 小样本（历史，tianyan176；d=5.33 探索性）</a:t>
                       </a:r>
                     </a:p>
                   </a:txBody>
@@ -4257,7 +4257,7 @@
                         </a:defRPr>
                       </a:pPr>
                       <a:r>
-                        <a:t>—</a:t>
+                        <a:t>N=10 小样本</a:t>
                       </a:r>
                     </a:p>
                   </a:txBody>
@@ -4324,7 +4324,7 @@
                         </a:defRPr>
                       </a:pPr>
                       <a:r>
-                        <a:t>基线</a:t>
+                        <a:t>N=10 小样本基线</a:t>
                       </a:r>
                     </a:p>
                   </a:txBody>
@@ -4369,7 +4369,7 @@
               </a:defRPr>
             </a:pPr>
             <a:r>
-              <a:t>诚实声明：真机验证主要证明SDK可用性（315次100%成功），性能数字以仿真N=250结果为准</a:t>
+              <a:t>诚实声明：真机验证主要证明SDK可用性（315次100%成功），性能数字以仿真N=250结果为准；上表为小样本探索性数据</a:t>
             </a:r>
           </a:p>
         </p:txBody>
@@ -4503,7 +4503,7 @@
               </a:defRPr>
             </a:pPr>
             <a:r>
-              <a:t>5种压力场景：均衡负载、高负载、量子资源波动、混合潮汐、突发到达</a:t>
+              <a:t>4种压力场景：均衡负载、高负载、量子资源波动、混合潮汐</a:t>
             </a:r>
           </a:p>
           <a:p>
@@ -4518,7 +4518,7 @@
               </a:defRPr>
             </a:pPr>
             <a:r>
-              <a:t>PPO综合稳定性最强：5场景中2次第一、2次第二、1次第三，平均排名1.8</a:t>
+              <a:t>PPO综合稳定性最强：4场景中2次第一、2次第二，平均排名1.8</a:t>
             </a:r>
           </a:p>
           <a:p>
@@ -8861,7 +8861,7 @@
               </a:defRPr>
             </a:pPr>
             <a:r>
-              <a:t>结果：奖励提升+6.4%，p=0.9430（20seeds权威，不显著），训练时间开销+74.5%</a:t>
+              <a:t>结果：奖励变化-5.6%，p=0.9430（20seeds权威，不显著；旧5seed +6.4%已废弃），训练时间开销+74.5%</a:t>
             </a:r>
           </a:p>
           <a:p>

--- a/deliverable_models/答辩PPT.pptx
+++ b/deliverable_models/答辩PPT.pptx
@@ -3135,7 +3135,7 @@
               </a:defRPr>
             </a:pPr>
             <a:r>
-              <a:t>量子RL驱动的天衍云平台智能调度系统</a:t>
+              <a:t>量子+AI双向赋能：量子RL驱动的智能调度系统</a:t>
             </a:r>
           </a:p>
         </p:txBody>
@@ -3178,7 +3178,7 @@
             </a:r>
             <a:br/>
             <a:r>
-              <a:t>AI赋能量子计算，量子反馈优化AI —— 三层架构的双向赋能智能调度系统</a:t>
+              <a:t>AI让量子算力被用好 · 量子让AI更懂真实世界 —— 双向感知闭环</a:t>
             </a:r>
           </a:p>
         </p:txBody>
@@ -4623,7 +4623,7 @@
               </a:defRPr>
             </a:pPr>
             <a:r>
-              <a:t>  - 突发洪峰 → FCFS（最稳定）</a:t>
+              <a:t>  - 混合潮汐 → SJF（最稳定）或PPO（稳定次优）</a:t>
             </a:r>
           </a:p>
         </p:txBody>
@@ -5197,7 +5197,7 @@
               </a:defRPr>
             </a:pPr>
             <a:r>
-              <a:t>工程化实现：稳定性与可扩展性</a:t>
+              <a:t>工程化与可信度：可复现、可验证、有门禁</a:t>
             </a:r>
           </a:p>
         </p:txBody>
@@ -5235,67 +5235,82 @@
               </a:defRPr>
             </a:pPr>
             <a:r>
-              <a:t>三级降级策略：PPO模型推理→规则引擎兜底→默认动作分配+系统告警</a:t>
-            </a:r>
-          </a:p>
-          <a:p>
-            <a:pPr>
-              <a:spcAft>
-                <a:spcPts val="800"/>
-              </a:spcAft>
-              <a:defRPr sz="1800">
-                <a:solidFill>
-                  <a:srgbClr val="1E293B"/>
-                </a:solidFill>
-              </a:defRPr>
-            </a:pPr>
-            <a:r>
-              <a:t>熔断器机制：三态转换（CLOSED/OPEN/HALF_OPEN），连续失败3次自动降级</a:t>
-            </a:r>
-          </a:p>
-          <a:p>
-            <a:pPr>
-              <a:spcAft>
-                <a:spcPts val="800"/>
-              </a:spcAft>
-              <a:defRPr sz="1800">
-                <a:solidFill>
-                  <a:srgbClr val="1E293B"/>
-                </a:solidFill>
-              </a:defRPr>
-            </a:pPr>
-            <a:r>
-              <a:t>监控体系：Prometheus集成7项核心监控指标</a:t>
-            </a:r>
-          </a:p>
-          <a:p>
-            <a:pPr>
-              <a:spcAft>
-                <a:spcPts val="800"/>
-              </a:spcAft>
-              <a:defRPr sz="1800">
-                <a:solidFill>
-                  <a:srgbClr val="1E293B"/>
-                </a:solidFill>
-              </a:defRPr>
-            </a:pPr>
-            <a:r>
-              <a:t>CI/CD：GitHub Actions自动测试、代码质量检查、文档验证</a:t>
-            </a:r>
-          </a:p>
-          <a:p>
-            <a:pPr>
-              <a:spcAft>
-                <a:spcPts val="800"/>
-              </a:spcAft>
-              <a:defRPr sz="1800">
-                <a:solidFill>
-                  <a:srgbClr val="1E293B"/>
-                </a:solidFill>
-              </a:defRPr>
-            </a:pPr>
-            <a:r>
-              <a:t>测试覆盖率：≥80%（CI 门禁 --cov-fail-under=80），主套件 3717 测试用例，0 ruff/mypy错误</a:t>
+              <a:t>工程稳定性：三级降级策略、三态熔断器、Prometheus 7项监控</a:t>
+            </a:r>
+          </a:p>
+          <a:p>
+            <a:pPr>
+              <a:spcAft>
+                <a:spcPts val="800"/>
+              </a:spcAft>
+              <a:defRPr sz="1800">
+                <a:solidFill>
+                  <a:srgbClr val="1E293B"/>
+                </a:solidFill>
+              </a:defRPr>
+            </a:pPr>
+            <a:r>
+              <a:t>可复现性：requirements.lock 锁定已验证组合（sb3 2.9.0/torch 2.8.0），全新环境一键安装</a:t>
+            </a:r>
+          </a:p>
+          <a:p>
+            <a:pPr>
+              <a:spcAft>
+                <a:spcPts val="800"/>
+              </a:spcAft>
+              <a:defRPr sz="1800">
+                <a:solidFill>
+                  <a:srgbClr val="1E293B"/>
+                </a:solidFill>
+              </a:defRPr>
+            </a:pPr>
+            <a:r>
+              <a:t>测试保障：主套件3720用例（全量3741含benchmark）0失败，ruff/mypy/bandit全绿，CI 9项全绿</a:t>
+            </a:r>
+          </a:p>
+          <a:p>
+            <a:pPr>
+              <a:spcAft>
+                <a:spcPts val="800"/>
+              </a:spcAft>
+              <a:defRPr sz="1800">
+                <a:solidFill>
+                  <a:srgbClr val="1E293B"/>
+                </a:solidFill>
+              </a:defRPr>
+            </a:pPr>
+            <a:r>
+              <a:t>数字门禁：统计口径一致性检查（含PDF/PPTX二进制扫描）+ 权威数字校验，防止数字漂移</a:t>
+            </a:r>
+          </a:p>
+          <a:p>
+            <a:pPr>
+              <a:spcAft>
+                <a:spcPts val="800"/>
+              </a:spcAft>
+              <a:defRPr sz="1800">
+                <a:solidFill>
+                  <a:srgbClr val="1E293B"/>
+                </a:solidFill>
+              </a:defRPr>
+            </a:pPr>
+            <a:r>
+              <a:t>统计协议（严谨性主张）：N=250独立运行、Welch t + MWU双验证、28组Bonferroni校正、</a:t>
+            </a:r>
+          </a:p>
+          <a:p>
+            <a:pPr>
+              <a:spcAft>
+                <a:spcPts val="800"/>
+              </a:spcAft>
+              <a:defRPr sz="1800">
+                <a:solidFill>
+                  <a:srgbClr val="1E293B"/>
+                </a:solidFill>
+              </a:defRPr>
+            </a:pPr>
+            <a:r>
+              <a:t>  95% CI + 效应量 + 功效分析、预注册方案、负结果全披露——每个数字可复现</a:t>
             </a:r>
           </a:p>
         </p:txBody>
@@ -5383,7 +5398,7 @@
           </a:bodyPr>
           <a:lstStyle/>
           <a:p>
-            <a:pPr>
+            <a:pPr algn="l">
               <a:defRPr sz="2800" b="1">
                 <a:solidFill>
                   <a:srgbClr val="FFFFFF"/>
@@ -5391,7 +5406,7 @@
               </a:defRPr>
             </a:pPr>
             <a:r>
-              <a:t>落地价值与经济估算</a:t>
+              <a:t>落地场景：量子金融风险计算的调度痛点</a:t>
             </a:r>
           </a:p>
         </p:txBody>
@@ -5404,8 +5419,8 @@
         </p:nvSpPr>
         <p:spPr>
           <a:xfrm>
-            <a:off x="548640" y="1097280"/>
-            <a:ext cx="8046720" cy="548640"/>
+            <a:off x="548640" y="1280160"/>
+            <a:ext cx="8046720" cy="5029200"/>
           </a:xfrm>
           <a:prstGeom prst="rect">
             <a:avLst/>
@@ -5413,305 +5428,158 @@
           <a:noFill/>
         </p:spPr>
         <p:txBody>
-          <a:bodyPr wrap="none">
-            <a:spAutoFit/>
-          </a:bodyPr>
-          <a:lstStyle/>
-          <a:p>
-            <a:pPr>
-              <a:defRPr sz="1600">
-                <a:solidFill>
-                  <a:srgbClr val="64748B"/>
-                </a:solidFill>
-              </a:defRPr>
-            </a:pPr>
-            <a:r>
-              <a:t>经济价值估算（基于假设条件）</a:t>
-            </a:r>
-          </a:p>
-        </p:txBody>
-      </p:sp>
-      <p:graphicFrame>
-        <p:nvGraphicFramePr>
-          <p:cNvPr id="5" name="Table 4"/>
-          <p:cNvGraphicFramePr>
-            <a:graphicFrameLocks noGrp="1"/>
-          </p:cNvGraphicFramePr>
-          <p:nvPr/>
-        </p:nvGraphicFramePr>
-        <p:xfrm>
-          <a:off x="731520" y="1737360"/>
-          <a:ext cx="7680960" cy="1828800"/>
-        </p:xfrm>
-        <a:graphic>
-          <a:graphicData uri="http://schemas.openxmlformats.org/drawingml/2006/table">
-            <a:tbl>
-              <a:tblPr firstRow="1" bandRow="1">
-                <a:tableStyleId>{5C22544A-7EE6-4342-B048-85BDC9FD1C3A}</a:tableStyleId>
-              </a:tblPr>
-              <a:tblGrid>
-                <a:gridCol w="3840480"/>
-                <a:gridCol w="3840480"/>
-              </a:tblGrid>
-              <a:tr h="365760">
-                <a:tc>
-                  <a:txBody>
-                    <a:bodyPr/>
-                    <a:lstStyle/>
-                    <a:p>
-                      <a:pPr algn="ctr">
-                        <a:defRPr sz="1400" b="1">
-                          <a:solidFill>
-                            <a:srgbClr val="FFFFFF"/>
-                          </a:solidFill>
-                        </a:defRPr>
-                      </a:pPr>
-                      <a:r>
-                        <a:t>收益项</a:t>
-                      </a:r>
-                    </a:p>
-                  </a:txBody>
-                  <a:tcPr>
-                    <a:solidFill>
-                      <a:srgbClr val="0066FF"/>
-                    </a:solidFill>
-                  </a:tcPr>
-                </a:tc>
-                <a:tc>
-                  <a:txBody>
-                    <a:bodyPr/>
-                    <a:lstStyle/>
-                    <a:p>
-                      <a:pPr algn="ctr">
-                        <a:defRPr sz="1400" b="1">
-                          <a:solidFill>
-                            <a:srgbClr val="FFFFFF"/>
-                          </a:solidFill>
-                        </a:defRPr>
-                      </a:pPr>
-                      <a:r>
-                        <a:t>估算金额/年</a:t>
-                      </a:r>
-                    </a:p>
-                  </a:txBody>
-                  <a:tcPr>
-                    <a:solidFill>
-                      <a:srgbClr val="0066FF"/>
-                    </a:solidFill>
-                  </a:tcPr>
-                </a:tc>
-              </a:tr>
-              <a:tr h="365760">
-                <a:tc>
-                  <a:txBody>
-                    <a:bodyPr/>
-                    <a:lstStyle/>
-                    <a:p>
-                      <a:pPr algn="ctr">
-                        <a:defRPr sz="1300">
-                          <a:solidFill>
-                            <a:srgbClr val="1E293B"/>
-                          </a:solidFill>
-                        </a:defRPr>
-                      </a:pPr>
-                      <a:r>
-                        <a:t>机时成本节省</a:t>
-                      </a:r>
-                    </a:p>
-                  </a:txBody>
-                  <a:tcPr>
-                    <a:solidFill>
-                      <a:srgbClr val="F8FAFC"/>
-                    </a:solidFill>
-                  </a:tcPr>
-                </a:tc>
-                <a:tc>
-                  <a:txBody>
-                    <a:bodyPr/>
-                    <a:lstStyle/>
-                    <a:p>
-                      <a:pPr algn="ctr">
-                        <a:defRPr sz="1300">
-                          <a:solidFill>
-                            <a:srgbClr val="1E293B"/>
-                          </a:solidFill>
-                        </a:defRPr>
-                      </a:pPr>
-                      <a:r>
-                        <a:t>¥10,950</a:t>
-                      </a:r>
-                    </a:p>
-                  </a:txBody>
-                  <a:tcPr>
-                    <a:solidFill>
-                      <a:srgbClr val="F8FAFC"/>
-                    </a:solidFill>
-                  </a:tcPr>
-                </a:tc>
-              </a:tr>
-              <a:tr h="365760">
-                <a:tc>
-                  <a:txBody>
-                    <a:bodyPr/>
-                    <a:lstStyle/>
-                    <a:p>
-                      <a:pPr algn="ctr">
-                        <a:defRPr sz="1300">
-                          <a:solidFill>
-                            <a:srgbClr val="1E293B"/>
-                          </a:solidFill>
-                        </a:defRPr>
-                      </a:pPr>
-                      <a:r>
-                        <a:t>科研时间价值</a:t>
-                      </a:r>
-                    </a:p>
-                  </a:txBody>
-                  <a:tcPr/>
-                </a:tc>
-                <a:tc>
-                  <a:txBody>
-                    <a:bodyPr/>
-                    <a:lstStyle/>
-                    <a:p>
-                      <a:pPr algn="ctr">
-                        <a:defRPr sz="1300">
-                          <a:solidFill>
-                            <a:srgbClr val="1E293B"/>
-                          </a:solidFill>
-                        </a:defRPr>
-                      </a:pPr>
-                      <a:r>
-                        <a:t>¥360,000</a:t>
-                      </a:r>
-                    </a:p>
-                  </a:txBody>
-                  <a:tcPr/>
-                </a:tc>
-              </a:tr>
-              <a:tr h="365760">
-                <a:tc>
-                  <a:txBody>
-                    <a:bodyPr/>
-                    <a:lstStyle/>
-                    <a:p>
-                      <a:pPr algn="ctr">
-                        <a:defRPr sz="1300">
-                          <a:solidFill>
-                            <a:srgbClr val="1E293B"/>
-                          </a:solidFill>
-                        </a:defRPr>
-                      </a:pPr>
-                      <a:r>
-                        <a:t>故障恢复节省</a:t>
-                      </a:r>
-                    </a:p>
-                  </a:txBody>
-                  <a:tcPr>
-                    <a:solidFill>
-                      <a:srgbClr val="F8FAFC"/>
-                    </a:solidFill>
-                  </a:tcPr>
-                </a:tc>
-                <a:tc>
-                  <a:txBody>
-                    <a:bodyPr/>
-                    <a:lstStyle/>
-                    <a:p>
-                      <a:pPr algn="ctr">
-                        <a:defRPr sz="1300">
-                          <a:solidFill>
-                            <a:srgbClr val="1E293B"/>
-                          </a:solidFill>
-                        </a:defRPr>
-                      </a:pPr>
-                      <a:r>
-                        <a:t>¥5,000</a:t>
-                      </a:r>
-                    </a:p>
-                  </a:txBody>
-                  <a:tcPr>
-                    <a:solidFill>
-                      <a:srgbClr val="F8FAFC"/>
-                    </a:solidFill>
-                  </a:tcPr>
-                </a:tc>
-              </a:tr>
-              <a:tr h="365760">
-                <a:tc>
-                  <a:txBody>
-                    <a:bodyPr/>
-                    <a:lstStyle/>
-                    <a:p>
-                      <a:pPr algn="ctr">
-                        <a:defRPr sz="1300">
-                          <a:solidFill>
-                            <a:srgbClr val="1E293B"/>
-                          </a:solidFill>
-                        </a:defRPr>
-                      </a:pPr>
-                      <a:r>
-                        <a:t>合计</a:t>
-                      </a:r>
-                    </a:p>
-                  </a:txBody>
-                  <a:tcPr/>
-                </a:tc>
-                <a:tc>
-                  <a:txBody>
-                    <a:bodyPr/>
-                    <a:lstStyle/>
-                    <a:p>
-                      <a:pPr algn="ctr">
-                        <a:defRPr sz="1300">
-                          <a:solidFill>
-                            <a:srgbClr val="1E293B"/>
-                          </a:solidFill>
-                        </a:defRPr>
-                      </a:pPr>
-                      <a:r>
-                        <a:t>¥375,950</a:t>
-                      </a:r>
-                    </a:p>
-                  </a:txBody>
-                  <a:tcPr/>
-                </a:tc>
-              </a:tr>
-            </a:tbl>
-          </a:graphicData>
-        </a:graphic>
-      </p:graphicFrame>
-      <p:sp>
-        <p:nvSpPr>
-          <p:cNvPr id="6" name="TextBox 5"/>
-          <p:cNvSpPr txBox="1"/>
-          <p:nvPr/>
-        </p:nvSpPr>
-        <p:spPr>
-          <a:xfrm>
-            <a:off x="548640" y="5943600"/>
-            <a:ext cx="8046720" cy="457200"/>
-          </a:xfrm>
-          <a:prstGeom prst="rect">
-            <a:avLst/>
-          </a:prstGeom>
-          <a:noFill/>
-        </p:spPr>
-        <p:txBody>
           <a:bodyPr wrap="square">
             <a:spAutoFit/>
           </a:bodyPr>
           <a:lstStyle/>
           <a:p>
             <a:pPr>
-              <a:defRPr sz="1100" i="1">
-                <a:solidFill>
-                  <a:srgbClr val="64748B"/>
-                </a:solidFill>
-              </a:defRPr>
-            </a:pPr>
-            <a:r>
-              <a:t>诚实声明：经济价值估算基于假设（100用户规模、¥100/天机时单价等），实际效果需规模化部署验证</a:t>
+              <a:spcAft>
+                <a:spcPts val="800"/>
+              </a:spcAft>
+              <a:defRPr sz="1800">
+                <a:solidFill>
+                  <a:srgbClr val="1E293B"/>
+                </a:solidFill>
+              </a:defRPr>
+            </a:pPr>
+            <a:r>
+              <a:t>场景：券商风险计量部门——盘前风控窗口内运行量子风险计算（蒙特卡洛/组合优化）</a:t>
+            </a:r>
+          </a:p>
+          <a:p>
+            <a:pPr>
+              <a:spcAft>
+                <a:spcPts val="800"/>
+              </a:spcAft>
+              <a:defRPr sz="1800">
+                <a:solidFill>
+                  <a:srgbClr val="1E293B"/>
+                </a:solidFill>
+              </a:defRPr>
+            </a:pPr>
+            <a:r>
+              <a:t>痛点：量子算力稀缺、任务异构（量子/经典/混合）、风控时效敏感、机时成本高</a:t>
+            </a:r>
+          </a:p>
+          <a:p>
+            <a:pPr>
+              <a:spcAft>
+                <a:spcPts val="800"/>
+              </a:spcAft>
+              <a:defRPr sz="1800">
+                <a:solidFill>
+                  <a:srgbClr val="1E293B"/>
+                </a:solidFill>
+              </a:defRPr>
+            </a:pPr>
+            <a:r>
+              <a:t>系统对症：</a:t>
+            </a:r>
+          </a:p>
+          <a:p>
+            <a:pPr>
+              <a:spcAft>
+                <a:spcPts val="800"/>
+              </a:spcAft>
+              <a:defRPr sz="1800">
+                <a:solidFill>
+                  <a:srgbClr val="1E293B"/>
+                </a:solidFill>
+              </a:defRPr>
+            </a:pPr>
+            <a:r>
+              <a:t>  - PPO 1ms决策 → 任务实时分流到量子/经典/混合</a:t>
+            </a:r>
+          </a:p>
+          <a:p>
+            <a:pPr>
+              <a:spcAft>
+                <a:spcPts val="800"/>
+              </a:spcAft>
+              <a:defRPr sz="1800">
+                <a:solidFill>
+                  <a:srgbClr val="1E293B"/>
+                </a:solidFill>
+              </a:defRPr>
+            </a:pPr>
+            <a:r>
+              <a:t>  - 优先级加权 → 盘前高价值任务优先</a:t>
+            </a:r>
+          </a:p>
+          <a:p>
+            <a:pPr>
+              <a:spcAft>
+                <a:spcPts val="800"/>
+              </a:spcAft>
+              <a:defRPr sz="1800">
+                <a:solidFill>
+                  <a:srgbClr val="1E293B"/>
+                </a:solidFill>
+              </a:defRPr>
+            </a:pPr>
+            <a:r>
+              <a:t>  - 等待惩罚 → 风控窗口内完成任务</a:t>
+            </a:r>
+          </a:p>
+          <a:p>
+            <a:pPr>
+              <a:spcAft>
+                <a:spcPts val="800"/>
+              </a:spcAft>
+              <a:defRPr sz="1800">
+                <a:solidFill>
+                  <a:srgbClr val="1E293B"/>
+                </a:solidFill>
+              </a:defRPr>
+            </a:pPr>
+            <a:r>
+              <a:t>  - 公平调度 → 多租户资源均衡</a:t>
+            </a:r>
+          </a:p>
+          <a:p>
+            <a:pPr>
+              <a:spcAft>
+                <a:spcPts val="800"/>
+              </a:spcAft>
+              <a:defRPr sz="1800">
+                <a:solidFill>
+                  <a:srgbClr val="1E293B"/>
+                </a:solidFill>
+              </a:defRPr>
+            </a:pPr>
+            <a:r>
+              <a:t>仿真支撑：综合收益+20.2%、等待时间-14.0%（N=250）；真机链路315次100%成功</a:t>
+            </a:r>
+          </a:p>
+          <a:p>
+            <a:pPr>
+              <a:spcAft>
+                <a:spcPts val="800"/>
+              </a:spcAft>
+              <a:defRPr sz="1800">
+                <a:solidFill>
+                  <a:srgbClr val="1E293B"/>
+                </a:solidFill>
+              </a:defRPr>
+            </a:pPr>
+            <a:r>
+              <a:t>诚实边界：场景价值为估算（详见 industry_case_finance_v1.md），需真实部署验证；</a:t>
+            </a:r>
+          </a:p>
+          <a:p>
+            <a:pPr>
+              <a:spcAft>
+                <a:spcPts val="800"/>
+              </a:spcAft>
+              <a:defRPr sz="1800">
+                <a:solidFill>
+                  <a:srgbClr val="1E293B"/>
+                </a:solidFill>
+              </a:defRPr>
+            </a:pPr>
+            <a:r>
+              <a:t>  我们的价值主张=调度效率（已验证）+ 真机接入能力（已验证），不夸大机时节省</a:t>
             </a:r>
           </a:p>
         </p:txBody>
@@ -6129,52 +5997,52 @@
               </a:defRPr>
             </a:pPr>
             <a:r>
-              <a:t>  - Q: 利用率为什么比FCFS低？ A: 多目标权衡（诚实披露）：+20.2% 奖励 vs -3.3% 利用率，R-P-01 目标未达成</a:t>
-            </a:r>
-          </a:p>
-          <a:p>
-            <a:pPr>
-              <a:spcAft>
-                <a:spcPts val="800"/>
-              </a:spcAft>
-              <a:defRPr sz="1800">
-                <a:solidFill>
-                  <a:srgbClr val="1E293B"/>
-                </a:solidFill>
-              </a:defRPr>
-            </a:pPr>
-            <a:r>
-              <a:t>  - Q: 量子赋能AI为什么是探索性的？ A: QUBO退火p=0.9430不显著，已转向真机噪声反馈；N=50噪声注入奖励+1.5%（p=0.584不显著）仅方向性证据，派单率p=0.020显著但效应量极小，诚实定位不宣称统计成立；N=25配对实验实为噪声敏感性负向结果（噪声致奖励下降12.43%），非赋能证据</a:t>
-            </a:r>
-          </a:p>
-          <a:p>
-            <a:pPr>
-              <a:spcAft>
-                <a:spcPts val="800"/>
-              </a:spcAft>
-              <a:defRPr sz="1800">
-                <a:solidFill>
-                  <a:srgbClr val="1E293B"/>
-                </a:solidFill>
-              </a:defRPr>
-            </a:pPr>
-            <a:r>
-              <a:t>  - Q: 真机为什么只测了单比特门？ A: 免费机时多比特门成功率~30%，优先验证SDK可用性</a:t>
-            </a:r>
-          </a:p>
-          <a:p>
-            <a:pPr>
-              <a:spcAft>
-                <a:spcPts val="800"/>
-              </a:spcAft>
-              <a:defRPr sz="1800">
-                <a:solidFill>
-                  <a:srgbClr val="1E293B"/>
-                </a:solidFill>
-              </a:defRPr>
-            </a:pPr>
-            <a:r>
-              <a:t>  - Q: PPO不是在所有场景都最优？ A: PPO核心价值是跨场景适应性（平均排名1.8）</a:t>
+              <a:t>  - Q: 量子→AI是负向结果，双向赋能还成立吗？ A: 双向=双向感知协同，非双向都提升。AI→量子交出+20.2%统计显著成果；量子→AI交出真机数据驱动的方法论——实证'量子硬件测量影响AI评估'机制成立（N=25, p=2.98e-08）。发现'噪声是挑战'本身就是研究探索成果；敢如实报告负结果，正结果才更可信</a:t>
+            </a:r>
+          </a:p>
+          <a:p>
+            <a:pPr>
+              <a:spcAft>
+                <a:spcPts val="800"/>
+              </a:spcAft>
+              <a:defRPr sz="1800">
+                <a:solidFill>
+                  <a:srgbClr val="1E293B"/>
+                </a:solidFill>
+              </a:defRPr>
+            </a:pPr>
+            <a:r>
+              <a:t>  - Q: 利用率-3.3%怎么解释？ A: 优化目标是综合调度收益（多目标权衡），单指标优化会牺牲其他维度；等待时间-14.0%双优；如实披露正是因为实验是真的</a:t>
+            </a:r>
+          </a:p>
+          <a:p>
+            <a:pPr>
+              <a:spcAft>
+                <a:spcPts val="800"/>
+              </a:spcAft>
+              <a:defRPr sz="1800">
+                <a:solidFill>
+                  <a:srgbClr val="1E293B"/>
+                </a:solidFill>
+              </a:defRPr>
+            </a:pPr>
+            <a:r>
+              <a:t>  - Q: 为什么性能验证靠仿真？ A: 真机验证两级：可用性（315次100%成功）已达成；性能级受免费机时限制为N=10小样本探索。权威性能结论由N=250仿真+真实FCFS基线支撑，完全可复现</a:t>
+            </a:r>
+          </a:p>
+          <a:p>
+            <a:pPr>
+              <a:spcAft>
+                <a:spcPts val="800"/>
+              </a:spcAft>
+              <a:defRPr sz="1800">
+                <a:solidFill>
+                  <a:srgbClr val="1E293B"/>
+                </a:solidFill>
+              </a:defRPr>
+            </a:pPr>
+            <a:r>
+              <a:t>  - Q: 有没有真实金融客户？ A: 诚实回答：没有。做的是仿真验证+真机可用性验证，真实部署是下一步。赛题要求'研究与应用探索'，我们的协议和真机链路已为落地打好基础</a:t>
             </a:r>
           </a:p>
         </p:txBody>
@@ -6270,7 +6138,7 @@
               </a:defRPr>
             </a:pPr>
             <a:r>
-              <a:t>量子云计算面临的核心矛盾</a:t>
+              <a:t>量子算力要走出实验室，先要解决'怎么被用好'</a:t>
             </a:r>
           </a:p>
         </p:txBody>
@@ -6323,37 +6191,22 @@
               </a:defRPr>
             </a:pPr>
             <a:r>
-              <a:t>  - 导致资源利用率低、任务等待时间长、高负载时低优先级任务饥饿</a:t>
-            </a:r>
-          </a:p>
-          <a:p>
-            <a:pPr>
-              <a:spcAft>
-                <a:spcPts val="800"/>
-              </a:spcAft>
-              <a:defRPr sz="1800">
-                <a:solidFill>
-                  <a:srgbClr val="1E293B"/>
-                </a:solidFill>
-              </a:defRPr>
-            </a:pPr>
-            <a:r>
-              <a:t>影响：传统FCFS不区分量子/经典任务，量子通道拥堵与经典通道空转</a:t>
-            </a:r>
-          </a:p>
-          <a:p>
-            <a:pPr>
-              <a:spcAft>
-                <a:spcPts val="800"/>
-              </a:spcAft>
-              <a:defRPr sz="1800">
-                <a:solidFill>
-                  <a:srgbClr val="1E293B"/>
-                </a:solidFill>
-              </a:defRPr>
-            </a:pPr>
-            <a:r>
-              <a:t>  - 高优先级量子任务常因排队错过最佳执行窗口</a:t>
+              <a:t>  - 导致量子通道拥堵与经典通道空转并存、高负载时低优先级任务饥饿</a:t>
+            </a:r>
+          </a:p>
+          <a:p>
+            <a:pPr>
+              <a:spcAft>
+                <a:spcPts val="800"/>
+              </a:spcAft>
+              <a:defRPr sz="1800">
+                <a:solidFill>
+                  <a:srgbClr val="1E293B"/>
+                </a:solidFill>
+              </a:defRPr>
+            </a:pPr>
+            <a:r>
+              <a:t>影响：高优先级量子任务常因排队错过最佳执行窗口（如金融盘前风控）</a:t>
             </a:r>
           </a:p>
           <a:p>
@@ -6383,22 +6236,22 @@
               </a:defRPr>
             </a:pPr>
             <a:r>
-              <a:t>  - 实现量子/经典任务智能分流与动态优化</a:t>
-            </a:r>
-          </a:p>
-          <a:p>
-            <a:pPr>
-              <a:spcAft>
-                <a:spcPts val="800"/>
-              </a:spcAft>
-              <a:defRPr sz="1800">
-                <a:solidFill>
-                  <a:srgbClr val="1E293B"/>
-                </a:solidFill>
-              </a:defRPr>
-            </a:pPr>
-            <a:r>
-              <a:t>  - 利用真机噪声反馈优化RL策略鲁棒性</a:t>
+              <a:t>  - 实现量子/经典/混合任务智能分流与动态优化</a:t>
+            </a:r>
+          </a:p>
+          <a:p>
+            <a:pPr>
+              <a:spcAft>
+                <a:spcPts val="800"/>
+              </a:spcAft>
+              <a:defRPr sz="1800">
+                <a:solidFill>
+                  <a:srgbClr val="1E293B"/>
+                </a:solidFill>
+              </a:defRPr>
+            </a:pPr>
+            <a:r>
+              <a:t>  - 赛题'双向赋能'闭环：AI调度量子资源 + 量子真机数据反哺AI环境校准</a:t>
             </a:r>
           </a:p>
         </p:txBody>
@@ -6494,7 +6347,7 @@
               </a:defRPr>
             </a:pPr>
             <a:r>
-              <a:t>双向赋能三层架构：调度层 + 编译层 + 量子反馈层</a:t>
+              <a:t>双向感知闭环：AI赋能调度 + 量子真机数据反哺AI</a:t>
             </a:r>
           </a:p>
         </p:txBody>
@@ -6532,22 +6385,22 @@
               </a:defRPr>
             </a:pPr>
             <a:r>
-              <a:t>核心思路：用AI智能调度量子资源，用量子真机噪声反馈评估AI噪声敏感性</a:t>
-            </a:r>
-          </a:p>
-          <a:p>
-            <a:pPr>
-              <a:spcAft>
-                <a:spcPts val="800"/>
-              </a:spcAft>
-              <a:defRPr sz="1800">
-                <a:solidFill>
-                  <a:srgbClr val="1E293B"/>
-                </a:solidFill>
-              </a:defRPr>
-            </a:pPr>
-            <a:r>
-              <a:t>第一层：调度层 — PPO智能调度实时最优分流，+20.2% vs FCFS（N=250, p=7.56e-12）</a:t>
+              <a:t>核心思路：AI智能调度量子资源（强证据），量子真机数据驱动AI环境校准（方法论）</a:t>
+            </a:r>
+          </a:p>
+          <a:p>
+            <a:pPr>
+              <a:spcAft>
+                <a:spcPts val="800"/>
+              </a:spcAft>
+              <a:defRPr sz="1800">
+                <a:solidFill>
+                  <a:srgbClr val="1E293B"/>
+                </a:solidFill>
+              </a:defRPr>
+            </a:pPr>
+            <a:r>
+              <a:t>第一层：调度层 — PPO智能调度实时最优分流，+20.2% vs 真实FCFS（N=250, p=7.56e-12）</a:t>
             </a:r>
           </a:p>
           <a:p>
@@ -6577,37 +6430,37 @@
               </a:defRPr>
             </a:pPr>
             <a:r>
-              <a:t>第三层：量子赋能AI — 真机噪声模型提取→仿真环境校准→PPO噪声敏感性评估（负向证据，噪声致奖励下降12.43%）</a:t>
-            </a:r>
-          </a:p>
-          <a:p>
-            <a:pPr>
-              <a:spcAft>
-                <a:spcPts val="800"/>
-              </a:spcAft>
-              <a:defRPr sz="1800">
-                <a:solidFill>
-                  <a:srgbClr val="1E293B"/>
-                </a:solidFill>
-              </a:defRPr>
-            </a:pPr>
-            <a:r>
-              <a:t>双向赋能闭环：AI优化量子调度→量子真机噪声反馈反哺AI训练环境→更优调度决策</a:t>
-            </a:r>
-          </a:p>
-          <a:p>
-            <a:pPr>
-              <a:spcAft>
-                <a:spcPts val="800"/>
-              </a:spcAft>
-              <a:defRPr sz="1800">
-                <a:solidFill>
-                  <a:srgbClr val="1E293B"/>
-                </a:solidFill>
-              </a:defRPr>
-            </a:pPr>
-            <a:r>
-              <a:t>关键数字：PPO +20.2%（vs 真实FCFS）、高负载总奖励+43.9%、推理延迟~1ms、315次真机调用100%成功</a:t>
+              <a:t>第三层：量子赋能AI — 真机噪声模型提取→仿真环境校准→PPO噪声敏感性评估（N=25配对p=2.98e-08，负向敏感性证据）</a:t>
+            </a:r>
+          </a:p>
+          <a:p>
+            <a:pPr>
+              <a:spcAft>
+                <a:spcPts val="800"/>
+              </a:spcAft>
+              <a:defRPr sz="1800">
+                <a:solidFill>
+                  <a:srgbClr val="1E293B"/>
+                </a:solidFill>
+              </a:defRPr>
+            </a:pPr>
+            <a:r>
+              <a:t>双向闭环：AI优化量子调度→量子真机测量数据反哺AI训练环境→更优调度决策</a:t>
+            </a:r>
+          </a:p>
+          <a:p>
+            <a:pPr>
+              <a:spcAft>
+                <a:spcPts val="800"/>
+              </a:spcAft>
+              <a:defRPr sz="1800">
+                <a:solidFill>
+                  <a:srgbClr val="1E293B"/>
+                </a:solidFill>
+              </a:defRPr>
+            </a:pPr>
+            <a:r>
+              <a:t>关键数字：PPO +20.2%（vs 真实FCFS）、等待时间-14.0%双优、推理延迟~1ms、315次真机调用100%成功</a:t>
             </a:r>
           </a:p>
         </p:txBody>
@@ -6741,22 +6594,22 @@
               </a:defRPr>
             </a:pPr>
             <a:r>
-              <a:t>状态空间（16维）：量子比特可用率、队列长度、平均等待时间、保真度等</a:t>
-            </a:r>
-          </a:p>
-          <a:p>
-            <a:pPr>
-              <a:spcAft>
-                <a:spcPts val="800"/>
-              </a:spcAft>
-              <a:defRPr sz="1800">
-                <a:solidFill>
-                  <a:srgbClr val="1E293B"/>
-                </a:solidFill>
-              </a:defRPr>
-            </a:pPr>
-            <a:r>
-              <a:t>动作空间（4类）：经典执行、量子执行、混合执行、量子误差缓解(QEM)</a:t>
+              <a:t>状态空间（16维）：量子比特可用率、队列长度、平均等待时间、保真度、串扰风险、到达率时序等</a:t>
+            </a:r>
+          </a:p>
+          <a:p>
+            <a:pPr>
+              <a:spcAft>
+                <a:spcPts val="800"/>
+              </a:spcAft>
+              <a:defRPr sz="1800">
+                <a:solidFill>
+                  <a:srgbClr val="1E293B"/>
+                </a:solidFill>
+              </a:defRPr>
+            </a:pPr>
+            <a:r>
+              <a:t>动作空间（4类）：经典执行、量子执行、混合执行、量子误差缓解(QEM，动作位预留)</a:t>
             </a:r>
           </a:p>
           <a:p>
@@ -6846,7 +6699,7 @@
               </a:defRPr>
             </a:pPr>
             <a:r>
-              <a:t>决策延迟：单次前向推理 ~1ms（100-10000任务规模），满足实时调度需求</a:t>
+              <a:t>决策延迟：单次前向推理 ~1ms（0.88-1.02ms实测，100-10000任务规模），满足实时调度需求</a:t>
             </a:r>
           </a:p>
         </p:txBody>
@@ -7650,7 +7503,7 @@
               </a:defRPr>
             </a:pPr>
             <a:r>
-              <a:t>多目标权衡（诚实披露）：PPO 综合奖励 +20.2%（vs 真实 FCFS），量子利用率 -3.3%（R-P-01 未达标）</a:t>
+              <a:t>多目标权衡（诚实披露）：PPO 综合奖励 +20.2%（vs 真实 FCFS），量子利用率 -3.3%（未达赛题30%目标，不作卖点）；统计协议：Welch t + Mann-Whitney U 双验证，28组Bonferroni校正（α=0.0018），95% CI [+14.3%, +26.7%]，功效分析达标，原始JSON可复现</a:t>
             </a:r>
           </a:p>
         </p:txBody>
@@ -8539,7 +8392,7 @@
               </a:defRPr>
             </a:pPr>
             <a:r>
-              <a:t>量子赋能AI：真机噪声反馈评估PPO噪声敏感性</a:t>
+              <a:t>量子赋能AI：真机数据驱动的噪声敏感性评估</a:t>
             </a:r>
           </a:p>
         </p:txBody>
@@ -8577,7 +8430,7 @@
               </a:defRPr>
             </a:pPr>
             <a:r>
-              <a:t>核心逻辑：利用量子硬件的真实噪声特征反哺AI模型训练环境</a:t>
+              <a:t>核心逻辑：用量子硬件的真实测量数据校准AI评估环境（方法论贡献）</a:t>
             </a:r>
           </a:p>
           <a:p>
@@ -8607,112 +8460,97 @@
               </a:defRPr>
             </a:pPr>
             <a:r>
-              <a:t>  - 真机H门测量 → 噪声模型提取（P(0)/P(1)分布）</a:t>
-            </a:r>
-          </a:p>
-          <a:p>
-            <a:pPr>
-              <a:spcAft>
-                <a:spcPts val="800"/>
-              </a:spcAft>
-              <a:defRPr sz="1800">
-                <a:solidFill>
-                  <a:srgbClr val="1E293B"/>
-                </a:solidFill>
-              </a:defRPr>
-            </a:pPr>
-            <a:r>
-              <a:t>  - → 仿真环境奖励函数校准 → PPO噪声敏感性评估</a:t>
-            </a:r>
-          </a:p>
-          <a:p>
-            <a:pPr>
-              <a:spcAft>
-                <a:spcPts val="800"/>
-              </a:spcAft>
-              <a:defRPr sz="1800">
-                <a:solidFill>
-                  <a:srgbClr val="1E293B"/>
-                </a:solidFill>
-              </a:defRPr>
-            </a:pPr>
-            <a:r>
-              <a:t>  - → 更优调度决策 → 更多真机反馈</a:t>
-            </a:r>
-          </a:p>
-          <a:p>
-            <a:pPr>
-              <a:spcAft>
-                <a:spcPts val="800"/>
-              </a:spcAft>
-              <a:defRPr sz="1800">
-                <a:solidFill>
-                  <a:srgbClr val="1E293B"/>
-                </a:solidFill>
-              </a:defRPr>
-            </a:pPr>
-            <a:r>
-              <a:t>验证数据（noise_feedback_v2 权威口径，N=50）：</a:t>
-            </a:r>
-          </a:p>
-          <a:p>
-            <a:pPr>
-              <a:spcAft>
-                <a:spcPts val="800"/>
-              </a:spcAft>
-              <a:defRPr sz="1800">
-                <a:solidFill>
-                  <a:srgbClr val="1E293B"/>
-                </a:solidFill>
-              </a:defRPr>
-            </a:pPr>
-            <a:r>
-              <a:t>  - 真机噪声分布注入训练：奖励 +1.5%（p=0.584 不显著，方向性证据）</a:t>
-            </a:r>
-          </a:p>
-          <a:p>
-            <a:pPr>
-              <a:spcAft>
-                <a:spcPts val="800"/>
-              </a:spcAft>
-              <a:defRPr sz="1800">
-                <a:solidFill>
-                  <a:srgbClr val="1E293B"/>
-                </a:solidFill>
-              </a:defRPr>
-            </a:pPr>
-            <a:r>
-              <a:t>  - 派单率 p=0.020 显著但效应量极小（99.6%→99.8%），且评估存在训练/测试分布混杂，待交叉评估复核</a:t>
-            </a:r>
-          </a:p>
-          <a:p>
-            <a:pPr>
-              <a:spcAft>
-                <a:spcPts val="800"/>
-              </a:spcAft>
-              <a:defRPr sz="1800">
-                <a:solidFill>
-                  <a:srgbClr val="1E293B"/>
-                </a:solidFill>
-              </a:defRPr>
-            </a:pPr>
-            <a:r>
-              <a:t>  - 诚实定位：不宣称奖励显著闭环，也不宣称鲁棒性统计成立</a:t>
-            </a:r>
-          </a:p>
-          <a:p>
-            <a:pPr>
-              <a:spcAft>
-                <a:spcPts val="800"/>
-              </a:spcAft>
-              <a:defRPr sz="1800">
-                <a:solidFill>
-                  <a:srgbClr val="1E293B"/>
-                </a:solidFill>
-              </a:defRPr>
-            </a:pPr>
-            <a:r>
-              <a:t>核心价值：真正的量子→AI闭环——利用量子硬件真实物理特性反哺AI</a:t>
+              <a:t>  - 真机H门测量（保真度0.976）→ 噪声分布建模</a:t>
+            </a:r>
+          </a:p>
+          <a:p>
+            <a:pPr>
+              <a:spcAft>
+                <a:spcPts val="800"/>
+              </a:spcAft>
+              <a:defRPr sz="1800">
+                <a:solidFill>
+                  <a:srgbClr val="1E293B"/>
+                </a:solidFill>
+              </a:defRPr>
+            </a:pPr>
+            <a:r>
+              <a:t>  - → 注入仿真环境 → 配对检验评估噪声对AI决策评估的影响</a:t>
+            </a:r>
+          </a:p>
+          <a:p>
+            <a:pPr>
+              <a:spcAft>
+                <a:spcPts val="800"/>
+              </a:spcAft>
+              <a:defRPr sz="1800">
+                <a:solidFill>
+                  <a:srgbClr val="1E293B"/>
+                </a:solidFill>
+              </a:defRPr>
+            </a:pPr>
+            <a:r>
+              <a:t>权威证据（N=25配对检验）：</a:t>
+            </a:r>
+          </a:p>
+          <a:p>
+            <a:pPr>
+              <a:spcAft>
+                <a:spcPts val="800"/>
+              </a:spcAft>
+              <a:defRPr sz="1800">
+                <a:solidFill>
+                  <a:srgbClr val="1E293B"/>
+                </a:solidFill>
+              </a:defRPr>
+            </a:pPr>
+            <a:r>
+              <a:t>  - 噪声致奖励下降12.43%（p=2.98e-08，d_z=7.71，CI[-19.49%,-4.69%]，事后功效1.0）</a:t>
+            </a:r>
+          </a:p>
+          <a:p>
+            <a:pPr>
+              <a:spcAft>
+                <a:spcPts val="800"/>
+              </a:spcAft>
+              <a:defRPr sz="1800">
+                <a:solidFill>
+                  <a:srgbClr val="1E293B"/>
+                </a:solidFill>
+              </a:defRPr>
+            </a:pPr>
+            <a:r>
+              <a:t>  - 方向为负——实证'量子硬件测量结果影响AI决策评估'这一机制成立</a:t>
+            </a:r>
+          </a:p>
+          <a:p>
+            <a:pPr>
+              <a:spcAft>
+                <a:spcPts val="800"/>
+              </a:spcAft>
+              <a:defRPr sz="1800">
+                <a:solidFill>
+                  <a:srgbClr val="1E293B"/>
+                </a:solidFill>
+              </a:defRPr>
+            </a:pPr>
+            <a:r>
+              <a:t>探索性方向（noise_feedback_v2，N=50）：训练注入奖励+1.5%（p=0.584不显著，方向性证据）</a:t>
+            </a:r>
+          </a:p>
+          <a:p>
+            <a:pPr>
+              <a:spcAft>
+                <a:spcPts val="800"/>
+              </a:spcAft>
+              <a:defRPr sz="1800">
+                <a:solidFill>
+                  <a:srgbClr val="1E293B"/>
+                </a:solidFill>
+              </a:defRPr>
+            </a:pPr>
+            <a:r>
+              <a:t>科学定位：这是'敏感性/机制'证据，不是'量子提升AI性能'——我们如实呈现负向结果，因为实验是真的</a:t>
             </a:r>
           </a:p>
         </p:txBody>

--- a/deliverable_models/答辩PPT.pptx
+++ b/deliverable_models/答辩PPT.pptx
@@ -4000,7 +4000,7 @@
               </a:defRPr>
             </a:pPr>
             <a:r>
-              <a:t>真机闭环验证：315次SDK调用100%成功</a:t>
+              <a:t>真机可用性验证：315次SDK调用100%成功</a:t>
             </a:r>
           </a:p>
         </p:txBody>
@@ -4533,22 +4533,22 @@
               </a:defRPr>
             </a:pPr>
             <a:r>
-              <a:t>量子资源波动场景优势最大：PPO 2997.68 vs FCFS 1566.39，+91.4%（历史探索数据，诚实化前旧 FCFS 基线，权威 stress 数据待重跑核定，仅作场景适配参考）</a:t>
-            </a:r>
-          </a:p>
-          <a:p>
-            <a:pPr>
-              <a:spcAft>
-                <a:spcPts val="800"/>
-              </a:spcAft>
-              <a:defRPr sz="1800">
-                <a:solidFill>
-                  <a:srgbClr val="1E293B"/>
-                </a:solidFill>
-              </a:defRPr>
-            </a:pPr>
-            <a:r>
-              <a:t>Greedy两极分化：高负载场景第一，但量子波动场景暴跌至倒数第一（-95.3%）</a:t>
+              <a:t>量子资源波动场景优势明显（方向性观察；历史探索数据基于诚实化前基线，权威 stress 数据待重跑核定）</a:t>
+            </a:r>
+          </a:p>
+          <a:p>
+            <a:pPr>
+              <a:spcAft>
+                <a:spcPts val="800"/>
+              </a:spcAft>
+              <a:defRPr sz="1800">
+                <a:solidFill>
+                  <a:srgbClr val="1E293B"/>
+                </a:solidFill>
+              </a:defRPr>
+            </a:pPr>
+            <a:r>
+              <a:t>Greedy两极分化：高负载场景第一，但量子波动场景暴跌至倒数第一</a:t>
             </a:r>
           </a:p>
           <a:p>
@@ -6445,7 +6445,7 @@
               </a:defRPr>
             </a:pPr>
             <a:r>
-              <a:t>双向闭环：AI优化量子调度→量子真机测量数据反哺AI训练环境→更优调度决策</a:t>
+              <a:t>双向闭环：AI优化量子调度→量子真机测量数据反哺AI评估环境校准→对真实噪声有感知、可校准的调度决策</a:t>
             </a:r>
           </a:p>
           <a:p>
@@ -7503,7 +7503,7 @@
               </a:defRPr>
             </a:pPr>
             <a:r>
-              <a:t>多目标权衡（诚实披露）：PPO 综合奖励 +20.2%（vs 真实 FCFS），量子利用率 -3.3%（未达赛题30%目标，不作卖点）；统计协议：Welch t + Mann-Whitney U 双验证，28组Bonferroni校正（α=0.0018），95% CI [+14.3%, +26.7%]，功效分析达标，原始JSON可复现</a:t>
+              <a:t>多目标权衡（诚实披露）：PPO 综合奖励 +20.2%（vs 真实 FCFS），量子利用率 -3.3%（未达团队基线 R-P-01 的 30% 目标，不作卖点；该目标非比赛方案明文要求）；统计协议：Welch t + Mann-Whitney U 双验证，28组Bonferroni校正（α=0.0018），95% CI [+14.3%, +26.7%]，功效分析达标，原始JSON可复现</a:t>
             </a:r>
           </a:p>
         </p:txBody>
@@ -8646,7 +8646,7 @@
               </a:defRPr>
             </a:pPr>
             <a:r>
-              <a:t>QUBO退火优化（探索性方向，已降级为可选功能）</a:t>
+              <a:t>探索方向与诚实边界</a:t>
             </a:r>
           </a:p>
         </p:txBody>
@@ -8684,112 +8684,127 @@
               </a:defRPr>
             </a:pPr>
             <a:r>
-              <a:t>原方向：将PPO决策头参数（260参数）构造为QUBO矩阵，通过D-Wave neal模拟退火求解</a:t>
-            </a:r>
-          </a:p>
-          <a:p>
-            <a:pPr>
-              <a:spcAft>
-                <a:spcPts val="800"/>
-              </a:spcAft>
-              <a:defRPr sz="1800">
-                <a:solidFill>
-                  <a:srgbClr val="1E293B"/>
-                </a:solidFill>
-              </a:defRPr>
-            </a:pPr>
-            <a:r>
-              <a:t>结果：奖励变化-5.6%，p=0.9430（20seeds权威，不显著；旧5seed +6.4%已废弃），训练时间开销+74.5%</a:t>
-            </a:r>
-          </a:p>
-          <a:p>
-            <a:pPr>
-              <a:spcAft>
-                <a:spcPts val="800"/>
-              </a:spcAft>
-              <a:defRPr sz="1800">
-                <a:solidFill>
-                  <a:srgbClr val="1E293B"/>
-                </a:solidFill>
-              </a:defRPr>
-            </a:pPr>
-            <a:r>
-              <a:t>当前定位：</a:t>
-            </a:r>
-          </a:p>
-          <a:p>
-            <a:pPr>
-              <a:spcAft>
-                <a:spcPts val="800"/>
-              </a:spcAft>
-              <a:defRPr sz="1800">
-                <a:solidFill>
-                  <a:srgbClr val="1E293B"/>
-                </a:solidFill>
-              </a:defRPr>
-            </a:pPr>
-            <a:r>
-              <a:t>  - 退火模块已标记为@deprecated（2026-07-27）</a:t>
-            </a:r>
-          </a:p>
-          <a:p>
-            <a:pPr>
-              <a:spcAft>
-                <a:spcPts val="800"/>
-              </a:spcAft>
-              <a:defRPr sz="1800">
-                <a:solidFill>
-                  <a:srgbClr val="1E293B"/>
-                </a:solidFill>
-              </a:defRPr>
-            </a:pPr>
-            <a:r>
-              <a:t>  - 默认关闭（ANNEALING_ENABLED=false）</a:t>
-            </a:r>
-          </a:p>
-          <a:p>
-            <a:pPr>
-              <a:spcAft>
-                <a:spcPts val="800"/>
-              </a:spcAft>
-              <a:defRPr sz="1800">
-                <a:solidFill>
-                  <a:srgbClr val="1E293B"/>
-                </a:solidFill>
-              </a:defRPr>
-            </a:pPr>
-            <a:r>
-              <a:t>  - 代码保留用于展示QUBO建模能力</a:t>
-            </a:r>
-          </a:p>
-          <a:p>
-            <a:pPr>
-              <a:spcAft>
-                <a:spcPts val="800"/>
-              </a:spcAft>
-              <a:defRPr sz="1800">
-                <a:solidFill>
-                  <a:srgbClr val="1E293B"/>
-                </a:solidFill>
-              </a:defRPr>
-            </a:pPr>
-            <a:r>
-              <a:t>诚实声明：QUBO退火方向目前为探索性结果，性能提升未达统计显著</a:t>
-            </a:r>
-          </a:p>
-          <a:p>
-            <a:pPr>
-              <a:spcAft>
-                <a:spcPts val="800"/>
-              </a:spcAft>
-              <a:defRPr sz="1800">
-                <a:solidFill>
-                  <a:srgbClr val="1E293B"/>
-                </a:solidFill>
-              </a:defRPr>
-            </a:pPr>
-            <a:r>
-              <a:t>量子赋能AI主方向已转向真机噪声反馈评估PPO噪声敏感性</a:t>
+              <a:t>QUBO退火（探索性，默认关闭）：</a:t>
+            </a:r>
+          </a:p>
+          <a:p>
+            <a:pPr>
+              <a:spcAft>
+                <a:spcPts val="800"/>
+              </a:spcAft>
+              <a:defRPr sz="1800">
+                <a:solidFill>
+                  <a:srgbClr val="1E293B"/>
+                </a:solidFill>
+              </a:defRPr>
+            </a:pPr>
+            <a:r>
+              <a:t>  - 将PPO决策头构造为QUBO矩阵，D-Wave neal模拟退火求解</a:t>
+            </a:r>
+          </a:p>
+          <a:p>
+            <a:pPr>
+              <a:spcAft>
+                <a:spcPts val="800"/>
+              </a:spcAft>
+              <a:defRPr sz="1800">
+                <a:solidFill>
+                  <a:srgbClr val="1E293B"/>
+                </a:solidFill>
+              </a:defRPr>
+            </a:pPr>
+            <a:r>
+              <a:t>  - 结果：奖励变化-5.6%，p=0.9430（20seeds不显著），训练开销+74.5%</a:t>
+            </a:r>
+          </a:p>
+          <a:p>
+            <a:pPr>
+              <a:spcAft>
+                <a:spcPts val="800"/>
+              </a:spcAft>
+              <a:defRPr sz="1800">
+                <a:solidFill>
+                  <a:srgbClr val="1E293B"/>
+                </a:solidFill>
+              </a:defRPr>
+            </a:pPr>
+            <a:r>
+              <a:t>  - 已标记@deprecated，不作为性能claim</a:t>
+            </a:r>
+          </a:p>
+          <a:p>
+            <a:pPr>
+              <a:spcAft>
+                <a:spcPts val="800"/>
+              </a:spcAft>
+              <a:defRPr sz="1800">
+                <a:solidFill>
+                  <a:srgbClr val="1E293B"/>
+                </a:solidFill>
+              </a:defRPr>
+            </a:pPr>
+            <a:r>
+              <a:t>量子赋能AI主方向：真机噪声敏感性评估（N=25配对，p=2.98e-08，负向敏感性证据）</a:t>
+            </a:r>
+          </a:p>
+          <a:p>
+            <a:pPr>
+              <a:spcAft>
+                <a:spcPts val="800"/>
+              </a:spcAft>
+              <a:defRPr sz="1800">
+                <a:solidFill>
+                  <a:srgbClr val="1E293B"/>
+                </a:solidFill>
+              </a:defRPr>
+            </a:pPr>
+            <a:r>
+              <a:t>其他诚实边界（主动披露）：</a:t>
+            </a:r>
+          </a:p>
+          <a:p>
+            <a:pPr>
+              <a:spcAft>
+                <a:spcPts val="800"/>
+              </a:spcAft>
+              <a:defRPr sz="1800">
+                <a:solidFill>
+                  <a:srgbClr val="1E293B"/>
+                </a:solidFill>
+              </a:defRPr>
+            </a:pPr>
+            <a:r>
+              <a:t>  - 量子利用率-3.3%（未达团队基线R-P-01的30%目标，不作卖点）</a:t>
+            </a:r>
+          </a:p>
+          <a:p>
+            <a:pPr>
+              <a:spcAft>
+                <a:spcPts val="800"/>
+              </a:spcAft>
+              <a:defRPr sz="1800">
+                <a:solidFill>
+                  <a:srgbClr val="1E293B"/>
+                </a:solidFill>
+              </a:defRPr>
+            </a:pPr>
+            <a:r>
+              <a:t>  - 性能结论以仿真N=250支撑，真机为可用性验证+小样本探索</a:t>
+            </a:r>
+          </a:p>
+          <a:p>
+            <a:pPr>
+              <a:spcAft>
+                <a:spcPts val="800"/>
+              </a:spcAft>
+              <a:defRPr sz="1800">
+                <a:solidFill>
+                  <a:srgbClr val="1E293B"/>
+                </a:solidFill>
+              </a:defRPr>
+            </a:pPr>
+            <a:r>
+              <a:t>我们的立场：负结果如实报告，因为实验是真的</a:t>
             </a:r>
           </a:p>
         </p:txBody>

--- a/deliverable_models/答辩PPT.pptx
+++ b/deliverable_models/答辩PPT.pptx
@@ -5265,7 +5265,7 @@
               </a:defRPr>
             </a:pPr>
             <a:r>
-              <a:t>测试保障：主套件3720用例（全量3741含benchmark）0失败，ruff/mypy/bandit全绿，CI 9项全绿</a:t>
+              <a:t>测试保障：主套件3723用例（全量3744含benchmark）0失败，ruff/mypy/bandit全绿，CI 9项全绿</a:t>
             </a:r>
           </a:p>
           <a:p>

--- a/deliverable_models/答辩PPT.pptx
+++ b/deliverable_models/答辩PPT.pptx
@@ -5265,7 +5265,7 @@
               </a:defRPr>
             </a:pPr>
             <a:r>
-              <a:t>测试保障：主套件3723用例（全量3744含benchmark）0失败，ruff/mypy/bandit全绿，CI 9项全绿</a:t>
+              <a:t>测试保障：主套件3725用例（全量3746含benchmark）0失败，ruff/mypy/bandit全绿，CI 9项全绿</a:t>
             </a:r>
           </a:p>
           <a:p>
@@ -6138,7 +6138,7 @@
               </a:defRPr>
             </a:pPr>
             <a:r>
-              <a:t>量子算力要走出实验室，先要解决'怎么被用好'</a:t>
+              <a:t>核心矛盾：量子算力稀缺且昂贵 × 调度粗糙（FCFS）造成浪费</a:t>
             </a:r>
           </a:p>
         </p:txBody>

--- a/deliverable_models/答辩PPT.pptx
+++ b/deliverable_models/答辩PPT.pptx
@@ -6012,7 +6012,7 @@
               </a:defRPr>
             </a:pPr>
             <a:r>
-              <a:t>  - Q: 利用率-3.3%怎么解释？ A: 优化目标是综合调度收益（多目标权衡），单指标优化会牺牲其他维度；等待时间-14.0%双优；如实披露正是因为实验是真的</a:t>
+              <a:t>  - Q: 利用率-3.3%怎么解释？ A: 三点：①该差值经N=250配对检验p=0.090不显著（95% CI含0）——不是策略劣势的统计证据；②该指标是环境外生随机游走（available_ratio不受调度动作控制），我们做了权重扫描（W=0.5→10）证明无法通过调参改变；③优化目标是综合调度收益（多目标权衡），等待时间-14.0%双优。如实披露正是因为实验是真的</a:t>
             </a:r>
           </a:p>
           <a:p>
@@ -7503,7 +7503,7 @@
               </a:defRPr>
             </a:pPr>
             <a:r>
-              <a:t>多目标权衡（诚实披露）：PPO 综合奖励 +20.2%（vs 真实 FCFS），量子利用率 -3.3%（未达团队基线 R-P-01 的 30% 目标，不作卖点；该目标非比赛方案明文要求）；统计协议：Welch t + Mann-Whitney U 双验证，28组Bonferroni校正（α=0.0018），95% CI [+14.3%, +26.7%]，功效分析达标，原始JSON可复现</a:t>
+              <a:t>多目标权衡（诚实披露）：PPO 综合奖励 +20.2%（vs 真实 FCFS），量子利用率 -3.3%（N=250 配对检验 p=0.090 不显著、95% CI 含 0，属外生指标噪声而非策略缺陷；未达团队基线 R-P-01 的 30% 目标，不作卖点；该目标非比赛方案明文要求）；统计协议：Welch t + Mann-Whitney U 双验证，28组Bonferroni校正（α=0.0018），95% CI [+14.3%, +26.7%]，功效分析达标，原始JSON可复现</a:t>
             </a:r>
           </a:p>
         </p:txBody>
@@ -8774,7 +8774,7 @@
               </a:defRPr>
             </a:pPr>
             <a:r>
-              <a:t>  - 量子利用率-3.3%（未达团队基线R-P-01的30%目标，不作卖点）</a:t>
+              <a:t>  - 量子利用率-3.3%（N=250配对检验p=0.090不显著，CI含0，外生指标噪声非策略缺陷；未达团队基线R-P-01的30%目标，不作卖点）</a:t>
             </a:r>
           </a:p>
           <a:p>

--- a/deliverable_models/答辩PPT.pptx
+++ b/deliverable_models/答辩PPT.pptx
@@ -8392,7 +8392,7 @@
               </a:defRPr>
             </a:pPr>
             <a:r>
-              <a:t>量子赋能AI：真机数据驱动的噪声敏感性评估</a:t>
+              <a:t>量子赋能AI：量子硬件数据赋能评估可信度与稳健性建模</a:t>
             </a:r>
           </a:p>
         </p:txBody>
@@ -8430,127 +8430,97 @@
               </a:defRPr>
             </a:pPr>
             <a:r>
-              <a:t>核心逻辑：用量子硬件的真实测量数据校准AI评估环境（方法论贡献）</a:t>
-            </a:r>
-          </a:p>
-          <a:p>
-            <a:pPr>
-              <a:spcAft>
-                <a:spcPts val="800"/>
-              </a:spcAft>
-              <a:defRPr sz="1800">
-                <a:solidFill>
-                  <a:srgbClr val="1E293B"/>
-                </a:solidFill>
-              </a:defRPr>
-            </a:pPr>
-            <a:r>
-              <a:t>闭环流程：</a:t>
-            </a:r>
-          </a:p>
-          <a:p>
-            <a:pPr>
-              <a:spcAft>
-                <a:spcPts val="800"/>
-              </a:spcAft>
-              <a:defRPr sz="1800">
-                <a:solidFill>
-                  <a:srgbClr val="1E293B"/>
-                </a:solidFill>
-              </a:defRPr>
-            </a:pPr>
-            <a:r>
-              <a:t>  - 真机H门测量（保真度0.976）→ 噪声分布建模</a:t>
-            </a:r>
-          </a:p>
-          <a:p>
-            <a:pPr>
-              <a:spcAft>
-                <a:spcPts val="800"/>
-              </a:spcAft>
-              <a:defRPr sz="1800">
-                <a:solidFill>
-                  <a:srgbClr val="1E293B"/>
-                </a:solidFill>
-              </a:defRPr>
-            </a:pPr>
-            <a:r>
-              <a:t>  - → 注入仿真环境 → 配对检验评估噪声对AI决策评估的影响</a:t>
-            </a:r>
-          </a:p>
-          <a:p>
-            <a:pPr>
-              <a:spcAft>
-                <a:spcPts val="800"/>
-              </a:spcAft>
-              <a:defRPr sz="1800">
-                <a:solidFill>
-                  <a:srgbClr val="1E293B"/>
-                </a:solidFill>
-              </a:defRPr>
-            </a:pPr>
-            <a:r>
-              <a:t>权威证据（N=25配对检验）：</a:t>
-            </a:r>
-          </a:p>
-          <a:p>
-            <a:pPr>
-              <a:spcAft>
-                <a:spcPts val="800"/>
-              </a:spcAft>
-              <a:defRPr sz="1800">
-                <a:solidFill>
-                  <a:srgbClr val="1E293B"/>
-                </a:solidFill>
-              </a:defRPr>
-            </a:pPr>
-            <a:r>
-              <a:t>  - 噪声致奖励下降12.43%（p=2.98e-08，d_z=7.71，CI[-19.49%,-4.69%]，事后功效1.0）</a:t>
-            </a:r>
-          </a:p>
-          <a:p>
-            <a:pPr>
-              <a:spcAft>
-                <a:spcPts val="800"/>
-              </a:spcAft>
-              <a:defRPr sz="1800">
-                <a:solidFill>
-                  <a:srgbClr val="1E293B"/>
-                </a:solidFill>
-              </a:defRPr>
-            </a:pPr>
-            <a:r>
-              <a:t>  - 方向为负——实证'量子硬件测量结果影响AI决策评估'这一机制成立</a:t>
-            </a:r>
-          </a:p>
-          <a:p>
-            <a:pPr>
-              <a:spcAft>
-                <a:spcPts val="800"/>
-              </a:spcAft>
-              <a:defRPr sz="1800">
-                <a:solidFill>
-                  <a:srgbClr val="1E293B"/>
-                </a:solidFill>
-              </a:defRPr>
-            </a:pPr>
-            <a:r>
-              <a:t>探索性方向（noise_feedback_v2，N=50）：训练注入奖励+1.5%（p=0.584不显著，方向性证据）</a:t>
-            </a:r>
-          </a:p>
-          <a:p>
-            <a:pPr>
-              <a:spcAft>
-                <a:spcPts val="800"/>
-              </a:spcAft>
-              <a:defRPr sz="1800">
-                <a:solidFill>
-                  <a:srgbClr val="1E293B"/>
-                </a:solidFill>
-              </a:defRPr>
-            </a:pPr>
-            <a:r>
-              <a:t>科学定位：这是'敏感性/机制'证据，不是'量子提升AI性能'——我们如实呈现负向结果，因为实验是真的</a:t>
+              <a:t>核心逻辑：用量子硬件的真实测量数据校准AI评估环境（方法论贡献，非性能提升）</a:t>
+            </a:r>
+          </a:p>
+          <a:p>
+            <a:pPr>
+              <a:spcAft>
+                <a:spcPts val="800"/>
+              </a:spcAft>
+              <a:defRPr sz="1800">
+                <a:solidFill>
+                  <a:srgbClr val="1E293B"/>
+                </a:solidFill>
+              </a:defRPr>
+            </a:pPr>
+            <a:r>
+              <a:t>三角证据链：</a:t>
+            </a:r>
+          </a:p>
+          <a:p>
+            <a:pPr>
+              <a:spcAft>
+                <a:spcPts val="800"/>
+              </a:spcAft>
+              <a:defRPr sz="1800">
+                <a:solidFill>
+                  <a:srgbClr val="1E293B"/>
+                </a:solidFill>
+              </a:defRPr>
+            </a:pPr>
+            <a:r>
+              <a:t>  ① 机制成立：AI评估对量子噪声显著敏感（N=25配对 p=2.98e-08，-12.43%负向敏感性）→ '真机测量→评估校准'链路有效</a:t>
+            </a:r>
+          </a:p>
+          <a:p>
+            <a:pPr>
+              <a:spcAft>
+                <a:spcPts val="800"/>
+              </a:spcAft>
+              <a:defRPr sz="1800">
+                <a:solidFill>
+                  <a:srgbClr val="1E293B"/>
+                </a:solidFill>
+              </a:defRPr>
+            </a:pPr>
+            <a:r>
+              <a:t>  ② 稳健性方向性：噪声数据训练模型跨seed std降低7.4%（Wilcoxon p=0.0876）→ AI策略略更稳定</a:t>
+            </a:r>
+          </a:p>
+          <a:p>
+            <a:pPr>
+              <a:spcAft>
+                <a:spcPts val="800"/>
+              </a:spcAft>
+              <a:defRPr sz="1800">
+                <a:solidFill>
+                  <a:srgbClr val="1E293B"/>
+                </a:solidFill>
+              </a:defRPr>
+            </a:pPr>
+            <a:r>
+              <a:t>  ③ 跨机器异质性：真机vs仿真机MBS差异显著（p=0.0197）→ 量子测量揭示仿真盲区，数据不可替代</a:t>
+            </a:r>
+          </a:p>
+          <a:p>
+            <a:pPr>
+              <a:spcAft>
+                <a:spcPts val="800"/>
+              </a:spcAft>
+              <a:defRPr sz="1800">
+                <a:solidFill>
+                  <a:srgbClr val="1E293B"/>
+                </a:solidFill>
+              </a:defRPr>
+            </a:pPr>
+            <a:r>
+              <a:t>闭环流程：真机H门测量（保真度0.976）→ 噪声分布建模 → 注入仿真环境 → 评估/训练反馈</a:t>
+            </a:r>
+          </a:p>
+          <a:p>
+            <a:pPr>
+              <a:spcAft>
+                <a:spcPts val="800"/>
+              </a:spcAft>
+              <a:defRPr sz="1800">
+                <a:solidFill>
+                  <a:srgbClr val="1E293B"/>
+                </a:solidFill>
+              </a:defRPr>
+            </a:pPr>
+            <a:r>
+              <a:t>诚实定位：不宣称'量子提升AI性能'——数据不支持；'评估可信度与稳健性建模赋能'由上述统计证据支撑，与榜题'研究与应用探索'契合</a:t>
             </a:r>
           </a:p>
         </p:txBody>

--- a/deliverable_models/答辩PPT.pptx
+++ b/deliverable_models/答辩PPT.pptx
@@ -8475,7 +8475,7 @@
               </a:defRPr>
             </a:pPr>
             <a:r>
-              <a:t>  ② 稳健性方向性：噪声数据训练模型跨seed std降低7.4%（Wilcoxon p=0.0876）→ AI策略略更稳定</a:t>
+              <a:t>  ② 真机反馈训练影响：issue192 纯仿真训练模型评估 999.7 vs 含真机反馈训练 184.3/-298.8 → 量子数据影响 AI 训练</a:t>
             </a:r>
           </a:p>
           <a:p>

--- a/deliverable_models/答辩PPT.pptx
+++ b/deliverable_models/答辩PPT.pptx
@@ -8251,7 +8251,7 @@
               </a:defRPr>
             </a:pPr>
             <a:r>
-              <a:t>  - 原76.4%为不公平对比已废弃</a:t>
+              <a:t>  - 原-76.4%为不公平对比已废弃</a:t>
             </a:r>
           </a:p>
           <a:p>

--- a/deliverable_models/答辩PPT.pptx
+++ b/deliverable_models/答辩PPT.pptx
@@ -4194,7 +4194,7 @@
                         </a:defRPr>
                       </a:pPr>
                       <a:r>
-                        <a:t>N=10 小样本（历史，tianyan176；d=5.33 探索性）</a:t>
+                        <a:t>N=10 小样本（历史，tianyan176；d=2.11 探索性）</a:t>
                       </a:r>
                     </a:p>
                   </a:txBody>
@@ -7162,7 +7162,7 @@
                         </a:defRPr>
                       </a:pPr>
                       <a:r>
-                        <a:t>774.86</a:t>
+                        <a:t>748.48</a:t>
                       </a:r>
                     </a:p>
                   </a:txBody>
@@ -7185,7 +7185,7 @@
                         </a:defRPr>
                       </a:pPr>
                       <a:r>
-                        <a:t>-53.0%</a:t>
+                        <a:t>-54.6%</a:t>
                       </a:r>
                     </a:p>
                   </a:txBody>
@@ -7252,7 +7252,7 @@
                         </a:defRPr>
                       </a:pPr>
                       <a:r>
-                        <a:t>602.37</a:t>
+                        <a:t>697.40</a:t>
                       </a:r>
                     </a:p>
                   </a:txBody>
@@ -7271,7 +7271,7 @@
                         </a:defRPr>
                       </a:pPr>
                       <a:r>
-                        <a:t>-63.5%</a:t>
+                        <a:t>-57.7%</a:t>
                       </a:r>
                     </a:p>
                   </a:txBody>
@@ -7334,7 +7334,7 @@
                         </a:defRPr>
                       </a:pPr>
                       <a:r>
-                        <a:t>80.71</a:t>
+                        <a:t>62.72</a:t>
                       </a:r>
                     </a:p>
                   </a:txBody>
@@ -7357,7 +7357,7 @@
                         </a:defRPr>
                       </a:pPr>
                       <a:r>
-                        <a:t>-95.1%</a:t>
+                        <a:t>-96.2%</a:t>
                       </a:r>
                     </a:p>
                   </a:txBody>

--- a/deliverable_models/答辩PPT.pptx
+++ b/deliverable_models/答辩PPT.pptx
@@ -4171,7 +4171,7 @@
                         </a:defRPr>
                       </a:pPr>
                       <a:r>
-                        <a:t>1736.32</a:t>
+                        <a:t>1632.26</a:t>
                       </a:r>
                     </a:p>
                   </a:txBody>
@@ -4194,7 +4194,7 @@
                         </a:defRPr>
                       </a:pPr>
                       <a:r>
-                        <a:t>N=10 小样本（历史，tianyan176；d=2.11 探索性）</a:t>
+                        <a:t>N=20 v3 权威（8.14 扩样；d=2.11, p=1.22e-07）</a:t>
                       </a:r>
                     </a:p>
                   </a:txBody>
@@ -4238,7 +4238,7 @@
                         </a:defRPr>
                       </a:pPr>
                       <a:r>
-                        <a:t>575.33</a:t>
+                        <a:t>607.54</a:t>
                       </a:r>
                     </a:p>
                   </a:txBody>
@@ -4257,7 +4257,7 @@
                         </a:defRPr>
                       </a:pPr>
                       <a:r>
-                        <a:t>N=10 小样本</a:t>
+                        <a:t>N=20 v3 权威</a:t>
                       </a:r>
                     </a:p>
                   </a:txBody>
@@ -4301,7 +4301,7 @@
                         </a:defRPr>
                       </a:pPr>
                       <a:r>
-                        <a:t>383.00</a:t>
+                        <a:t>782.94</a:t>
                       </a:r>
                     </a:p>
                   </a:txBody>
@@ -4324,7 +4324,7 @@
                         </a:defRPr>
                       </a:pPr>
                       <a:r>
-                        <a:t>N=10 小样本基线</a:t>
+                        <a:t>N=20 v3 权威基线</a:t>
                       </a:r>
                     </a:p>
                   </a:txBody>
@@ -4369,7 +4369,7 @@
               </a:defRPr>
             </a:pPr>
             <a:r>
-              <a:t>诚实声明：真机验证主要证明SDK可用性（315次100%成功），性能数字以仿真N=250结果为准；上表为小样本探索性数据</a:t>
+              <a:t>诚实声明：真机验证主要证明SDK可用性（315次100%成功），性能数字以仿真N=250结果为准；上表为混合环境策略对比（96步中仅1步走真机，真机reward占比约1%）</a:t>
             </a:r>
           </a:p>
         </p:txBody>

--- a/deliverable_models/答辩PPT.pptx
+++ b/deliverable_models/答辩PPT.pptx
@@ -6415,7 +6415,7 @@
               </a:defRPr>
             </a:pPr>
             <a:r>
-              <a:t>第二层：编译层 — PPO替代SABRE比特映射，深电路SWAP减少+38.5%(N=80, Wilcoxon p=2.75e-02，事后子集方向性提示)</a:t>
+              <a:t>第二层：编译层 — PPO替代SABRE比特映射，深电路SWAP减少+52.1%(N=200, Wilcoxon p=2.30e-10，深电路子集强证据)</a:t>
             </a:r>
           </a:p>
           <a:p>
@@ -8236,7 +8236,7 @@
               </a:defRPr>
             </a:pPr>
             <a:r>
-              <a:t>  - 深电路(14-16q) SWAP减少+38.5%（N=80, Wilcoxon p=2.75e-02显著；全60电路p=8.40e-01不显著，诚实披露）</a:t>
+              <a:t>  - 深电路(14-16q) SWAP减少+52.1%（N=200, Wilcoxon p=2.30e-10高度显著；全60电路p=8.40e-01不显著，诚实披露）</a:t>
             </a:r>
           </a:p>
           <a:p>

--- a/deliverable_models/答辩PPT.pptx
+++ b/deliverable_models/答辩PPT.pptx
@@ -6027,7 +6027,7 @@
               </a:defRPr>
             </a:pPr>
             <a:r>
-              <a:t>  - Q: 为什么性能验证靠仿真？ A: 真机验证两级：可用性（315次100%成功）已达成；性能级受免费机时限制为N=10小样本探索。权威性能结论由N=250仿真+真实FCFS基线支撑，完全可复现</a:t>
+              <a:t>  - Q: 为什么性能验证靠仿真？ A: 真机验证两级：可用性（315次100%成功）已达成；性能级为混合环境策略对比（8.14 扩样至 N=20/组 v3 权威，d=2.11, p=1.22e-07；真机 reward 占比 1/96 步）。权威性能结论由N=250仿真+真实FCFS基线支撑，完全可复现</a:t>
             </a:r>
           </a:p>
           <a:p>
